--- a/presentation/MVKobraAI_Presentacion_Gerencial.pptx
+++ b/presentation/MVKobraAI_Presentacion_Gerencial.pptx
@@ -23,6 +23,7 @@
     <p:sldId id="271" r:id="rId22"/>
     <p:sldId id="272" r:id="rId23"/>
     <p:sldId id="273" r:id="rId24"/>
+    <p:sldId id="274" r:id="rId25"/>
   </p:sldIdLst>
   <p:sldSz cx="12191695" cy="6858000" type="screen4x3"/>
   <p:notesSz cx="6858000" cy="9144000"/>
@@ -3375,7 +3376,7 @@
                 </a:solidFill>
                 <a:latin typeface="Segoe UI"/>
               </a:rPr>
-              <a:t>Asistencia en vivo durante la llamada</a:t>
+              <a:t>Copiloto de Negociación en Vivo</a:t>
             </a:r>
           </a:p>
         </p:txBody>
@@ -3410,7 +3411,7 @@
                 </a:solidFill>
                 <a:latin typeface="Segoe UI"/>
               </a:rPr>
-              <a:t>Escucha la llamada telefónica, transcribe y asesora al gestor en tiempo real.</a:t>
+              <a:t>Sentimiento del cliente turno a turno, técnicas del gestor y la próxima jugada sugerida.</a:t>
             </a:r>
           </a:p>
         </p:txBody>
@@ -3432,7 +3433,7 @@
           <a:noFill/>
           <a:ln w="12700">
             <a:solidFill>
-              <a:srgbClr val="2F74C0"/>
+              <a:srgbClr val="215EA3"/>
             </a:solidFill>
           </a:ln>
           <a:effectLst/>
@@ -3461,7 +3462,7 @@
       </p:sp>
       <p:pic>
         <p:nvPicPr>
-          <p:cNvPr id="5" name="Picture 4" descr="realtime_copiloto.png"/>
+          <p:cNvPr id="5" name="Picture 4" descr="dashboard_copiloto_detalle.png"/>
           <p:cNvPicPr>
             <a:picLocks noChangeAspect="1"/>
           </p:cNvPicPr>
@@ -3476,7 +3477,7 @@
         <p:spPr>
           <a:xfrm>
             <a:off x="640080" y="1554480"/>
-            <a:ext cx="10927080" cy="7284720"/>
+            <a:ext cx="10927080" cy="6829425"/>
           </a:xfrm>
           <a:prstGeom prst="rect">
             <a:avLst/>
@@ -3539,7 +3540,7 @@
                 </a:solidFill>
                 <a:latin typeface="Segoe UI"/>
               </a:rPr>
-              <a:t>Voz: diarización + emoción acústica</a:t>
+              <a:t>Asistencia en vivo durante la llamada</a:t>
             </a:r>
           </a:p>
         </p:txBody>
@@ -3574,7 +3575,7 @@
                 </a:solidFill>
                 <a:latin typeface="Segoe UI"/>
               </a:rPr>
-              <a:t>Separa quién habla y detecta la tensión del cliente en la voz, más allá de las palabras.</a:t>
+              <a:t>Escucha la llamada telefónica, transcribe y asesora al gestor en tiempo real.</a:t>
             </a:r>
           </a:p>
         </p:txBody>
@@ -3596,7 +3597,7 @@
           <a:noFill/>
           <a:ln w="12700">
             <a:solidFill>
-              <a:srgbClr val="2F74C0"/>
+              <a:srgbClr val="215EA3"/>
             </a:solidFill>
           </a:ln>
           <a:effectLst/>
@@ -3625,7 +3626,7 @@
       </p:sp>
       <p:pic>
         <p:nvPicPr>
-          <p:cNvPr id="5" name="Picture 4" descr="dashboard_voz2.png"/>
+          <p:cNvPr id="5" name="Picture 4" descr="realtime_copiloto.png"/>
           <p:cNvPicPr>
             <a:picLocks noChangeAspect="1"/>
           </p:cNvPicPr>
@@ -3640,7 +3641,7 @@
         <p:spPr>
           <a:xfrm>
             <a:off x="640080" y="1554480"/>
-            <a:ext cx="10927080" cy="7170896"/>
+            <a:ext cx="10927080" cy="7284720"/>
           </a:xfrm>
           <a:prstGeom prst="rect">
             <a:avLst/>
@@ -3703,7 +3704,7 @@
                 </a:solidFill>
                 <a:latin typeface="Segoe UI"/>
               </a:rPr>
-              <a:t>Integración telefónica + transcripción por hablante</a:t>
+              <a:t>Voz: diarización + emoción acústica</a:t>
             </a:r>
           </a:p>
         </p:txBody>
@@ -3738,7 +3739,7 @@
                 </a:solidFill>
                 <a:latin typeface="Segoe UI"/>
               </a:rPr>
-              <a:t>Conecta al audio de la central (Avaya, Genesys…); transcribe por hablante y fusiona voz + texto.</a:t>
+              <a:t>Separa quién habla y detecta la tensión del cliente en la voz, más allá de las palabras.</a:t>
             </a:r>
           </a:p>
         </p:txBody>
@@ -3760,7 +3761,7 @@
           <a:noFill/>
           <a:ln w="12700">
             <a:solidFill>
-              <a:srgbClr val="2F74C0"/>
+              <a:srgbClr val="215EA3"/>
             </a:solidFill>
           </a:ln>
           <a:effectLst/>
@@ -3789,7 +3790,7 @@
       </p:sp>
       <p:pic>
         <p:nvPicPr>
-          <p:cNvPr id="5" name="Picture 4" descr="realtime_telefonia.png"/>
+          <p:cNvPr id="5" name="Picture 4" descr="dashboard_voz2.png"/>
           <p:cNvPicPr>
             <a:picLocks noChangeAspect="1"/>
           </p:cNvPicPr>
@@ -3804,7 +3805,7 @@
         <p:spPr>
           <a:xfrm>
             <a:off x="640080" y="1554480"/>
-            <a:ext cx="10927080" cy="8253588"/>
+            <a:ext cx="10927080" cy="7170896"/>
           </a:xfrm>
           <a:prstGeom prst="rect">
             <a:avLst/>
@@ -3867,7 +3868,7 @@
                 </a:solidFill>
                 <a:latin typeface="Segoe UI"/>
               </a:rPr>
-              <a:t>Streaming en vivo durante la llamada</a:t>
+              <a:t>Integración telefónica + transcripción por hablante</a:t>
             </a:r>
           </a:p>
         </p:txBody>
@@ -3902,7 +3903,7 @@
                 </a:solidFill>
                 <a:latin typeface="Segoe UI"/>
               </a:rPr>
-              <a:t>SIPREC / Twilio Media Streams / Avaya DMCC: asesoría turno a turno mientras la llamada ocurre.</a:t>
+              <a:t>Conecta al audio de la central (Avaya, Genesys…); transcribe por hablante y fusiona voz + texto.</a:t>
             </a:r>
           </a:p>
         </p:txBody>
@@ -3924,7 +3925,7 @@
           <a:noFill/>
           <a:ln w="12700">
             <a:solidFill>
-              <a:srgbClr val="2F74C0"/>
+              <a:srgbClr val="215EA3"/>
             </a:solidFill>
           </a:ln>
           <a:effectLst/>
@@ -3953,7 +3954,7 @@
       </p:sp>
       <p:pic>
         <p:nvPicPr>
-          <p:cNvPr id="5" name="Picture 4" descr="realtime_stream.png"/>
+          <p:cNvPr id="5" name="Picture 4" descr="realtime_telefonia.png"/>
           <p:cNvPicPr>
             <a:picLocks noChangeAspect="1"/>
           </p:cNvPicPr>
@@ -3968,7 +3969,7 @@
         <p:spPr>
           <a:xfrm>
             <a:off x="640080" y="1554480"/>
-            <a:ext cx="10927080" cy="10326091"/>
+            <a:ext cx="10927080" cy="8253588"/>
           </a:xfrm>
           <a:prstGeom prst="rect">
             <a:avLst/>
@@ -4031,7 +4032,7 @@
                 </a:solidFill>
                 <a:latin typeface="Segoe UI"/>
               </a:rPr>
-              <a:t>Gestores &amp; Evolución</a:t>
+              <a:t>Streaming en vivo durante la llamada</a:t>
             </a:r>
           </a:p>
         </p:txBody>
@@ -4066,7 +4067,7 @@
                 </a:solidFill>
                 <a:latin typeface="Segoe UI"/>
               </a:rPr>
-              <a:t>Impacto de MV Kobra AI en calidad, conversión y recupero; evolución mes a mes por gestor.</a:t>
+              <a:t>SIPREC / Twilio Media Streams / Avaya DMCC: asesoría turno a turno mientras la llamada ocurre.</a:t>
             </a:r>
           </a:p>
         </p:txBody>
@@ -4088,7 +4089,7 @@
           <a:noFill/>
           <a:ln w="12700">
             <a:solidFill>
-              <a:srgbClr val="2F74C0"/>
+              <a:srgbClr val="215EA3"/>
             </a:solidFill>
           </a:ln>
           <a:effectLst/>
@@ -4117,7 +4118,7 @@
       </p:sp>
       <p:pic>
         <p:nvPicPr>
-          <p:cNvPr id="5" name="Picture 4" descr="dashboard_gestores.png"/>
+          <p:cNvPr id="5" name="Picture 4" descr="realtime_stream.png"/>
           <p:cNvPicPr>
             <a:picLocks noChangeAspect="1"/>
           </p:cNvPicPr>
@@ -4132,7 +4133,7 @@
         <p:spPr>
           <a:xfrm>
             <a:off x="640080" y="1554480"/>
-            <a:ext cx="10927080" cy="9561195"/>
+            <a:ext cx="10927080" cy="10326091"/>
           </a:xfrm>
           <a:prstGeom prst="rect">
             <a:avLst/>
@@ -4173,8 +4174,8 @@
         </p:nvSpPr>
         <p:spPr>
           <a:xfrm>
-            <a:off x="640080" y="457200"/>
-            <a:ext cx="10972800" cy="731520"/>
+            <a:off x="640080" y="320040"/>
+            <a:ext cx="10972800" cy="640080"/>
           </a:xfrm>
           <a:prstGeom prst="rect">
             <a:avLst/>
@@ -4189,36 +4190,71 @@
           <a:p>
             <a:pPr algn="l"/>
             <a:r>
-              <a:rPr sz="3200" b="1">
-                <a:solidFill>
-                  <a:srgbClr val="EAF1FB"/>
-                </a:solidFill>
-                <a:latin typeface="Segoe UI"/>
-              </a:rPr>
-              <a:t>Cómo se mide el impacto de MV Kobra AI</a:t>
-            </a:r>
-          </a:p>
-        </p:txBody>
-      </p:sp>
-      <p:sp>
-        <p:nvSpPr>
-          <p:cNvPr id="3" name="Rounded Rectangle 2"/>
+              <a:rPr sz="2800" b="1">
+                <a:solidFill>
+                  <a:srgbClr val="00C896"/>
+                </a:solidFill>
+                <a:latin typeface="Segoe UI"/>
+              </a:rPr>
+              <a:t>Gestores &amp; Evolución</a:t>
+            </a:r>
+          </a:p>
+        </p:txBody>
+      </p:sp>
+      <p:sp>
+        <p:nvSpPr>
+          <p:cNvPr id="3" name="TextBox 2"/>
+          <p:cNvSpPr txBox="1"/>
+          <p:nvPr/>
+        </p:nvSpPr>
+        <p:spPr>
+          <a:xfrm>
+            <a:off x="640080" y="914400"/>
+            <a:ext cx="10972800" cy="457200"/>
+          </a:xfrm>
+          <a:prstGeom prst="rect">
+            <a:avLst/>
+          </a:prstGeom>
+          <a:noFill/>
+        </p:spPr>
+        <p:txBody>
+          <a:bodyPr wrap="square" anchor="t">
+            <a:spAutoFit/>
+          </a:bodyPr>
+          <a:lstStyle/>
+          <a:p>
+            <a:pPr algn="l"/>
+            <a:r>
+              <a:rPr sz="1500" b="0">
+                <a:solidFill>
+                  <a:srgbClr val="9DB0C8"/>
+                </a:solidFill>
+                <a:latin typeface="Segoe UI"/>
+              </a:rPr>
+              <a:t>Impacto de MV Kobra AI en calidad, conversión y recupero; evolución mes a mes por gestor.</a:t>
+            </a:r>
+          </a:p>
+        </p:txBody>
+      </p:sp>
+      <p:sp>
+        <p:nvSpPr>
+          <p:cNvPr id="4" name="Rounded Rectangle 3"/>
           <p:cNvSpPr/>
           <p:nvPr/>
         </p:nvSpPr>
         <p:spPr>
           <a:xfrm>
-            <a:off x="640080" y="1280160"/>
-            <a:ext cx="137160" cy="640080"/>
+            <a:off x="502920" y="1417320"/>
+            <a:ext cx="11201400" cy="5074920"/>
           </a:xfrm>
           <a:prstGeom prst="roundRect">
             <a:avLst/>
           </a:prstGeom>
-          <a:solidFill>
-            <a:srgbClr val="00C896"/>
-          </a:solidFill>
-          <a:ln>
-            <a:noFill/>
+          <a:noFill/>
+          <a:ln w="12700">
+            <a:solidFill>
+              <a:srgbClr val="215EA3"/>
+            </a:solidFill>
           </a:ln>
           <a:effectLst/>
         </p:spPr>
@@ -4244,459 +4280,30 @@
           </a:p>
         </p:txBody>
       </p:sp>
-      <p:sp>
-        <p:nvSpPr>
-          <p:cNvPr id="4" name="TextBox 3"/>
-          <p:cNvSpPr txBox="1"/>
-          <p:nvPr/>
-        </p:nvSpPr>
-        <p:spPr>
-          <a:xfrm>
-            <a:off x="822960" y="1554480"/>
-            <a:ext cx="10515600" cy="548640"/>
-          </a:xfrm>
-          <a:prstGeom prst="rect">
-            <a:avLst/>
-          </a:prstGeom>
-          <a:noFill/>
-        </p:spPr>
-        <p:txBody>
-          <a:bodyPr wrap="square" anchor="t">
-            <a:spAutoFit/>
-          </a:bodyPr>
-          <a:lstStyle/>
-          <a:p>
-            <a:pPr algn="l"/>
-            <a:r>
-              <a:rPr sz="1500" b="0">
-                <a:solidFill>
-                  <a:srgbClr val="F2B441"/>
-                </a:solidFill>
-                <a:latin typeface="Segoe UI"/>
-              </a:rPr>
-              <a:t>Metodología: gestores con MV Kobra AI vs. grupo de control, mismo período. Cifras ILUSTRATIVAS sobre datos sintéticos — no son resultados medidos.</a:t>
-            </a:r>
-          </a:p>
-        </p:txBody>
-      </p:sp>
-      <p:sp>
-        <p:nvSpPr>
-          <p:cNvPr id="5" name="Rounded Rectangle 4"/>
-          <p:cNvSpPr/>
-          <p:nvPr/>
-        </p:nvSpPr>
-        <p:spPr>
-          <a:xfrm>
-            <a:off x="640080" y="2377440"/>
-            <a:ext cx="3566160" cy="2194560"/>
-          </a:xfrm>
-          <a:prstGeom prst="roundRect">
-            <a:avLst/>
-          </a:prstGeom>
-          <a:solidFill>
-            <a:srgbClr val="0E1E34"/>
-          </a:solidFill>
-          <a:ln w="12700">
-            <a:solidFill>
-              <a:srgbClr val="00C896"/>
-            </a:solidFill>
-          </a:ln>
-          <a:effectLst/>
-        </p:spPr>
-        <p:style>
-          <a:lnRef idx="1">
-            <a:schemeClr val="accent1"/>
-          </a:lnRef>
-          <a:fillRef idx="3">
-            <a:schemeClr val="accent1"/>
-          </a:fillRef>
-          <a:effectRef idx="2">
-            <a:schemeClr val="accent1"/>
-          </a:effectRef>
-          <a:fontRef idx="minor">
-            <a:schemeClr val="lt1"/>
-          </a:fontRef>
-        </p:style>
-        <p:txBody>
-          <a:bodyPr rtlCol="0" anchor="ctr"/>
-          <a:lstStyle/>
-          <a:p>
-            <a:pPr algn="ctr"/>
-          </a:p>
-        </p:txBody>
-      </p:sp>
-      <p:sp>
-        <p:nvSpPr>
-          <p:cNvPr id="6" name="TextBox 5"/>
-          <p:cNvSpPr txBox="1"/>
-          <p:nvPr/>
-        </p:nvSpPr>
-        <p:spPr>
-          <a:xfrm>
-            <a:off x="640080" y="2880360"/>
-            <a:ext cx="3566160" cy="914400"/>
-          </a:xfrm>
-          <a:prstGeom prst="rect">
-            <a:avLst/>
-          </a:prstGeom>
-          <a:noFill/>
-        </p:spPr>
-        <p:txBody>
-          <a:bodyPr wrap="square" anchor="t">
-            <a:spAutoFit/>
-          </a:bodyPr>
-          <a:lstStyle/>
-          <a:p>
-            <a:pPr algn="ctr"/>
-            <a:r>
-              <a:rPr sz="4400" b="1">
-                <a:solidFill>
-                  <a:srgbClr val="00C896"/>
-                </a:solidFill>
-                <a:latin typeface="Segoe UI"/>
-              </a:rPr>
-              <a:t>+14.9</a:t>
-            </a:r>
-          </a:p>
-        </p:txBody>
-      </p:sp>
-      <p:sp>
-        <p:nvSpPr>
-          <p:cNvPr id="7" name="TextBox 6"/>
-          <p:cNvSpPr txBox="1"/>
-          <p:nvPr/>
-        </p:nvSpPr>
-        <p:spPr>
-          <a:xfrm>
-            <a:off x="640080" y="3931920"/>
-            <a:ext cx="3566160" cy="457200"/>
-          </a:xfrm>
-          <a:prstGeom prst="rect">
-            <a:avLst/>
-          </a:prstGeom>
-          <a:noFill/>
-        </p:spPr>
-        <p:txBody>
-          <a:bodyPr wrap="square" anchor="t">
-            <a:spAutoFit/>
-          </a:bodyPr>
-          <a:lstStyle/>
-          <a:p>
-            <a:pPr algn="ctr"/>
-            <a:r>
-              <a:rPr sz="1500" b="0">
-                <a:solidFill>
-                  <a:srgbClr val="9DB0C8"/>
-                </a:solidFill>
-                <a:latin typeface="Segoe UI"/>
-              </a:rPr>
-              <a:t>puntos de calidad de gestión</a:t>
-            </a:r>
-          </a:p>
-        </p:txBody>
-      </p:sp>
-      <p:sp>
-        <p:nvSpPr>
-          <p:cNvPr id="8" name="Rounded Rectangle 7"/>
-          <p:cNvSpPr/>
-          <p:nvPr/>
-        </p:nvSpPr>
-        <p:spPr>
-          <a:xfrm>
-            <a:off x="4434840" y="2377440"/>
-            <a:ext cx="3566160" cy="2194560"/>
-          </a:xfrm>
-          <a:prstGeom prst="roundRect">
-            <a:avLst/>
-          </a:prstGeom>
-          <a:solidFill>
-            <a:srgbClr val="0E1E34"/>
-          </a:solidFill>
-          <a:ln w="12700">
-            <a:solidFill>
-              <a:srgbClr val="2F74C0"/>
-            </a:solidFill>
-          </a:ln>
-          <a:effectLst/>
-        </p:spPr>
-        <p:style>
-          <a:lnRef idx="1">
-            <a:schemeClr val="accent1"/>
-          </a:lnRef>
-          <a:fillRef idx="3">
-            <a:schemeClr val="accent1"/>
-          </a:fillRef>
-          <a:effectRef idx="2">
-            <a:schemeClr val="accent1"/>
-          </a:effectRef>
-          <a:fontRef idx="minor">
-            <a:schemeClr val="lt1"/>
-          </a:fontRef>
-        </p:style>
-        <p:txBody>
-          <a:bodyPr rtlCol="0" anchor="ctr"/>
-          <a:lstStyle/>
-          <a:p>
-            <a:pPr algn="ctr"/>
-          </a:p>
-        </p:txBody>
-      </p:sp>
-      <p:sp>
-        <p:nvSpPr>
-          <p:cNvPr id="9" name="TextBox 8"/>
-          <p:cNvSpPr txBox="1"/>
-          <p:nvPr/>
-        </p:nvSpPr>
-        <p:spPr>
-          <a:xfrm>
-            <a:off x="4434840" y="2880360"/>
-            <a:ext cx="3566160" cy="914400"/>
-          </a:xfrm>
-          <a:prstGeom prst="rect">
-            <a:avLst/>
-          </a:prstGeom>
-          <a:noFill/>
-        </p:spPr>
-        <p:txBody>
-          <a:bodyPr wrap="square" anchor="t">
-            <a:spAutoFit/>
-          </a:bodyPr>
-          <a:lstStyle/>
-          <a:p>
-            <a:pPr algn="ctr"/>
-            <a:r>
-              <a:rPr sz="4400" b="1">
-                <a:solidFill>
-                  <a:srgbClr val="2F74C0"/>
-                </a:solidFill>
-                <a:latin typeface="Segoe UI"/>
-              </a:rPr>
-              <a:t>+7.6 pp</a:t>
-            </a:r>
-          </a:p>
-        </p:txBody>
-      </p:sp>
-      <p:sp>
-        <p:nvSpPr>
-          <p:cNvPr id="10" name="TextBox 9"/>
-          <p:cNvSpPr txBox="1"/>
-          <p:nvPr/>
-        </p:nvSpPr>
-        <p:spPr>
-          <a:xfrm>
-            <a:off x="4434840" y="3931920"/>
-            <a:ext cx="3566160" cy="457200"/>
-          </a:xfrm>
-          <a:prstGeom prst="rect">
-            <a:avLst/>
-          </a:prstGeom>
-          <a:noFill/>
-        </p:spPr>
-        <p:txBody>
-          <a:bodyPr wrap="square" anchor="t">
-            <a:spAutoFit/>
-          </a:bodyPr>
-          <a:lstStyle/>
-          <a:p>
-            <a:pPr algn="ctr"/>
-            <a:r>
-              <a:rPr sz="1500" b="0">
-                <a:solidFill>
-                  <a:srgbClr val="9DB0C8"/>
-                </a:solidFill>
-                <a:latin typeface="Segoe UI"/>
-              </a:rPr>
-              <a:t>tasa de conversión</a:t>
-            </a:r>
-          </a:p>
-        </p:txBody>
-      </p:sp>
-      <p:sp>
-        <p:nvSpPr>
-          <p:cNvPr id="11" name="Rounded Rectangle 10"/>
-          <p:cNvSpPr/>
-          <p:nvPr/>
-        </p:nvSpPr>
-        <p:spPr>
-          <a:xfrm>
-            <a:off x="8229600" y="2377440"/>
-            <a:ext cx="3566160" cy="2194560"/>
-          </a:xfrm>
-          <a:prstGeom prst="roundRect">
-            <a:avLst/>
-          </a:prstGeom>
-          <a:solidFill>
-            <a:srgbClr val="0E1E34"/>
-          </a:solidFill>
-          <a:ln w="12700">
-            <a:solidFill>
-              <a:srgbClr val="F2B441"/>
-            </a:solidFill>
-          </a:ln>
-          <a:effectLst/>
-        </p:spPr>
-        <p:style>
-          <a:lnRef idx="1">
-            <a:schemeClr val="accent1"/>
-          </a:lnRef>
-          <a:fillRef idx="3">
-            <a:schemeClr val="accent1"/>
-          </a:fillRef>
-          <a:effectRef idx="2">
-            <a:schemeClr val="accent1"/>
-          </a:effectRef>
-          <a:fontRef idx="minor">
-            <a:schemeClr val="lt1"/>
-          </a:fontRef>
-        </p:style>
-        <p:txBody>
-          <a:bodyPr rtlCol="0" anchor="ctr"/>
-          <a:lstStyle/>
-          <a:p>
-            <a:pPr algn="ctr"/>
-          </a:p>
-        </p:txBody>
-      </p:sp>
-      <p:sp>
-        <p:nvSpPr>
-          <p:cNvPr id="12" name="TextBox 11"/>
-          <p:cNvSpPr txBox="1"/>
-          <p:nvPr/>
-        </p:nvSpPr>
-        <p:spPr>
-          <a:xfrm>
-            <a:off x="8229600" y="2880360"/>
-            <a:ext cx="3566160" cy="914400"/>
-          </a:xfrm>
-          <a:prstGeom prst="rect">
-            <a:avLst/>
-          </a:prstGeom>
-          <a:noFill/>
-        </p:spPr>
-        <p:txBody>
-          <a:bodyPr wrap="square" anchor="t">
-            <a:spAutoFit/>
-          </a:bodyPr>
-          <a:lstStyle/>
-          <a:p>
-            <a:pPr algn="ctr"/>
-            <a:r>
-              <a:rPr sz="4400" b="1">
-                <a:solidFill>
-                  <a:srgbClr val="F2B441"/>
-                </a:solidFill>
-                <a:latin typeface="Segoe UI"/>
-              </a:rPr>
-              <a:t>+5.6 pp</a:t>
-            </a:r>
-          </a:p>
-        </p:txBody>
-      </p:sp>
-      <p:sp>
-        <p:nvSpPr>
-          <p:cNvPr id="13" name="TextBox 12"/>
-          <p:cNvSpPr txBox="1"/>
-          <p:nvPr/>
-        </p:nvSpPr>
-        <p:spPr>
-          <a:xfrm>
-            <a:off x="8229600" y="3931920"/>
-            <a:ext cx="3566160" cy="457200"/>
-          </a:xfrm>
-          <a:prstGeom prst="rect">
-            <a:avLst/>
-          </a:prstGeom>
-          <a:noFill/>
-        </p:spPr>
-        <p:txBody>
-          <a:bodyPr wrap="square" anchor="t">
-            <a:spAutoFit/>
-          </a:bodyPr>
-          <a:lstStyle/>
-          <a:p>
-            <a:pPr algn="ctr"/>
-            <a:r>
-              <a:rPr sz="1500" b="0">
-                <a:solidFill>
-                  <a:srgbClr val="9DB0C8"/>
-                </a:solidFill>
-                <a:latin typeface="Segoe UI"/>
-              </a:rPr>
-              <a:t>tasa de recupero</a:t>
-            </a:r>
-          </a:p>
-        </p:txBody>
-      </p:sp>
-      <p:sp>
-        <p:nvSpPr>
-          <p:cNvPr id="14" name="TextBox 13"/>
-          <p:cNvSpPr txBox="1"/>
-          <p:nvPr/>
-        </p:nvSpPr>
-        <p:spPr>
-          <a:xfrm>
-            <a:off x="822960" y="5120640"/>
-            <a:ext cx="10515600" cy="914400"/>
-          </a:xfrm>
-          <a:prstGeom prst="rect">
-            <a:avLst/>
-          </a:prstGeom>
-          <a:noFill/>
-        </p:spPr>
-        <p:txBody>
-          <a:bodyPr wrap="square" anchor="t">
-            <a:spAutoFit/>
-          </a:bodyPr>
-          <a:lstStyle/>
-          <a:p>
-            <a:pPr algn="ctr"/>
-            <a:r>
-              <a:rPr sz="1400" b="0">
-                <a:solidFill>
-                  <a:srgbClr val="EAF1FB"/>
-                </a:solidFill>
-                <a:latin typeface="Segoe UI"/>
-              </a:rPr>
-              <a:t>Con MV Kobra AI: calidad 74 · conversión 70% · recupero 45%   |   Sin MV Kobra AI: calidad 60 · conversión 63% · recupero 40%</a:t>
-            </a:r>
-          </a:p>
-        </p:txBody>
-      </p:sp>
-      <p:sp>
-        <p:nvSpPr>
-          <p:cNvPr id="15" name="TextBox 14"/>
-          <p:cNvSpPr txBox="1"/>
-          <p:nvPr/>
-        </p:nvSpPr>
-        <p:spPr>
-          <a:xfrm>
-            <a:off x="822960" y="5852160"/>
-            <a:ext cx="10515600" cy="548640"/>
-          </a:xfrm>
-          <a:prstGeom prst="rect">
-            <a:avLst/>
-          </a:prstGeom>
-          <a:noFill/>
-        </p:spPr>
-        <p:txBody>
-          <a:bodyPr wrap="square" anchor="t">
-            <a:spAutoFit/>
-          </a:bodyPr>
-          <a:lstStyle/>
-          <a:p>
-            <a:pPr algn="ctr"/>
-            <a:r>
-              <a:rPr sz="1400" b="0">
-                <a:solidFill>
-                  <a:srgbClr val="00C896"/>
-                </a:solidFill>
-                <a:latin typeface="Segoe UI"/>
-              </a:rPr>
-              <a:t>En un piloto real, este mismo análisis (control vs. adopción) produce el impacto MEDIDO — esa es la evidencia que se presenta, no esta simulación.</a:t>
-            </a:r>
-          </a:p>
-        </p:txBody>
-      </p:sp>
+      <p:pic>
+        <p:nvPicPr>
+          <p:cNvPr id="5" name="Picture 4" descr="dashboard_gestores.png"/>
+          <p:cNvPicPr>
+            <a:picLocks noChangeAspect="1"/>
+          </p:cNvPicPr>
+          <p:nvPr/>
+        </p:nvPicPr>
+        <p:blipFill>
+          <a:blip r:embed="rId2"/>
+          <a:stretch>
+            <a:fillRect/>
+          </a:stretch>
+        </p:blipFill>
+        <p:spPr>
+          <a:xfrm>
+            <a:off x="640080" y="1554480"/>
+            <a:ext cx="10927080" cy="9561195"/>
+          </a:xfrm>
+          <a:prstGeom prst="rect">
+            <a:avLst/>
+          </a:prstGeom>
+        </p:spPr>
+      </p:pic>
     </p:spTree>
   </p:cSld>
   <p:clrMapOvr>
@@ -4753,7 +4360,7 @@
                 </a:solidFill>
                 <a:latin typeface="Segoe UI"/>
               </a:rPr>
-              <a:t>Por qué MV Kobra AI</a:t>
+              <a:t>Cómo se mide el impacto de MV Kobra AI</a:t>
             </a:r>
           </a:p>
         </p:txBody>
@@ -4810,113 +4417,447 @@
         </p:nvSpPr>
         <p:spPr>
           <a:xfrm>
-            <a:off x="822960" y="1828800"/>
-            <a:ext cx="10515600" cy="4114800"/>
-          </a:xfrm>
-          <a:prstGeom prst="rect">
-            <a:avLst/>
-          </a:prstGeom>
-          <a:noFill/>
-        </p:spPr>
-        <p:txBody>
-          <a:bodyPr wrap="square">
-            <a:spAutoFit/>
-          </a:bodyPr>
-          <a:lstStyle/>
-          <a:p>
-            <a:pPr>
-              <a:spcAft>
-                <a:spcPts val="1400"/>
-              </a:spcAft>
-            </a:pPr>
-            <a:r>
-              <a:rPr sz="1900">
+            <a:off x="822960" y="1554480"/>
+            <a:ext cx="10515600" cy="548640"/>
+          </a:xfrm>
+          <a:prstGeom prst="rect">
+            <a:avLst/>
+          </a:prstGeom>
+          <a:noFill/>
+        </p:spPr>
+        <p:txBody>
+          <a:bodyPr wrap="square" anchor="t">
+            <a:spAutoFit/>
+          </a:bodyPr>
+          <a:lstStyle/>
+          <a:p>
+            <a:pPr algn="l"/>
+            <a:r>
+              <a:rPr sz="1500" b="0">
+                <a:solidFill>
+                  <a:srgbClr val="F2B441"/>
+                </a:solidFill>
+                <a:latin typeface="Segoe UI"/>
+              </a:rPr>
+              <a:t>Metodología: gestores con MV Kobra AI vs. grupo de control, mismo período. Cifras ILUSTRATIVAS sobre datos sintéticos — no son resultados medidos.</a:t>
+            </a:r>
+          </a:p>
+        </p:txBody>
+      </p:sp>
+      <p:sp>
+        <p:nvSpPr>
+          <p:cNvPr id="5" name="Rounded Rectangle 4"/>
+          <p:cNvSpPr/>
+          <p:nvPr/>
+        </p:nvSpPr>
+        <p:spPr>
+          <a:xfrm>
+            <a:off x="640080" y="2377440"/>
+            <a:ext cx="3566160" cy="2194560"/>
+          </a:xfrm>
+          <a:prstGeom prst="roundRect">
+            <a:avLst/>
+          </a:prstGeom>
+          <a:solidFill>
+            <a:srgbClr val="0E1E34"/>
+          </a:solidFill>
+          <a:ln w="12700">
+            <a:solidFill>
+              <a:srgbClr val="00C896"/>
+            </a:solidFill>
+          </a:ln>
+          <a:effectLst/>
+        </p:spPr>
+        <p:style>
+          <a:lnRef idx="1">
+            <a:schemeClr val="accent1"/>
+          </a:lnRef>
+          <a:fillRef idx="3">
+            <a:schemeClr val="accent1"/>
+          </a:fillRef>
+          <a:effectRef idx="2">
+            <a:schemeClr val="accent1"/>
+          </a:effectRef>
+          <a:fontRef idx="minor">
+            <a:schemeClr val="lt1"/>
+          </a:fontRef>
+        </p:style>
+        <p:txBody>
+          <a:bodyPr rtlCol="0" anchor="ctr"/>
+          <a:lstStyle/>
+          <a:p>
+            <a:pPr algn="ctr"/>
+          </a:p>
+        </p:txBody>
+      </p:sp>
+      <p:sp>
+        <p:nvSpPr>
+          <p:cNvPr id="6" name="TextBox 5"/>
+          <p:cNvSpPr txBox="1"/>
+          <p:nvPr/>
+        </p:nvSpPr>
+        <p:spPr>
+          <a:xfrm>
+            <a:off x="640080" y="2880360"/>
+            <a:ext cx="3566160" cy="914400"/>
+          </a:xfrm>
+          <a:prstGeom prst="rect">
+            <a:avLst/>
+          </a:prstGeom>
+          <a:noFill/>
+        </p:spPr>
+        <p:txBody>
+          <a:bodyPr wrap="square" anchor="t">
+            <a:spAutoFit/>
+          </a:bodyPr>
+          <a:lstStyle/>
+          <a:p>
+            <a:pPr algn="ctr"/>
+            <a:r>
+              <a:rPr sz="4400" b="1">
                 <a:solidFill>
                   <a:srgbClr val="00C896"/>
                 </a:solidFill>
                 <a:latin typeface="Segoe UI"/>
               </a:rPr>
-              <a:t>▸  Más recupero: prioriza por valor esperado, no por antigüedad de la deuda.</a:t>
-            </a:r>
-          </a:p>
-          <a:p>
-            <a:pPr>
-              <a:spcAft>
-                <a:spcPts val="1400"/>
-              </a:spcAft>
-            </a:pPr>
-            <a:r>
-              <a:rPr sz="1900">
+              <a:t>+14.7</a:t>
+            </a:r>
+          </a:p>
+        </p:txBody>
+      </p:sp>
+      <p:sp>
+        <p:nvSpPr>
+          <p:cNvPr id="7" name="TextBox 6"/>
+          <p:cNvSpPr txBox="1"/>
+          <p:nvPr/>
+        </p:nvSpPr>
+        <p:spPr>
+          <a:xfrm>
+            <a:off x="640080" y="3931920"/>
+            <a:ext cx="3566160" cy="457200"/>
+          </a:xfrm>
+          <a:prstGeom prst="rect">
+            <a:avLst/>
+          </a:prstGeom>
+          <a:noFill/>
+        </p:spPr>
+        <p:txBody>
+          <a:bodyPr wrap="square" anchor="t">
+            <a:spAutoFit/>
+          </a:bodyPr>
+          <a:lstStyle/>
+          <a:p>
+            <a:pPr algn="ctr"/>
+            <a:r>
+              <a:rPr sz="1500" b="0">
+                <a:solidFill>
+                  <a:srgbClr val="9DB0C8"/>
+                </a:solidFill>
+                <a:latin typeface="Segoe UI"/>
+              </a:rPr>
+              <a:t>puntos de calidad de gestión</a:t>
+            </a:r>
+          </a:p>
+        </p:txBody>
+      </p:sp>
+      <p:sp>
+        <p:nvSpPr>
+          <p:cNvPr id="8" name="Rounded Rectangle 7"/>
+          <p:cNvSpPr/>
+          <p:nvPr/>
+        </p:nvSpPr>
+        <p:spPr>
+          <a:xfrm>
+            <a:off x="4434840" y="2377440"/>
+            <a:ext cx="3566160" cy="2194560"/>
+          </a:xfrm>
+          <a:prstGeom prst="roundRect">
+            <a:avLst/>
+          </a:prstGeom>
+          <a:solidFill>
+            <a:srgbClr val="0E1E34"/>
+          </a:solidFill>
+          <a:ln w="12700">
+            <a:solidFill>
+              <a:srgbClr val="215EA3"/>
+            </a:solidFill>
+          </a:ln>
+          <a:effectLst/>
+        </p:spPr>
+        <p:style>
+          <a:lnRef idx="1">
+            <a:schemeClr val="accent1"/>
+          </a:lnRef>
+          <a:fillRef idx="3">
+            <a:schemeClr val="accent1"/>
+          </a:fillRef>
+          <a:effectRef idx="2">
+            <a:schemeClr val="accent1"/>
+          </a:effectRef>
+          <a:fontRef idx="minor">
+            <a:schemeClr val="lt1"/>
+          </a:fontRef>
+        </p:style>
+        <p:txBody>
+          <a:bodyPr rtlCol="0" anchor="ctr"/>
+          <a:lstStyle/>
+          <a:p>
+            <a:pPr algn="ctr"/>
+          </a:p>
+        </p:txBody>
+      </p:sp>
+      <p:sp>
+        <p:nvSpPr>
+          <p:cNvPr id="9" name="TextBox 8"/>
+          <p:cNvSpPr txBox="1"/>
+          <p:nvPr/>
+        </p:nvSpPr>
+        <p:spPr>
+          <a:xfrm>
+            <a:off x="4434840" y="2880360"/>
+            <a:ext cx="3566160" cy="914400"/>
+          </a:xfrm>
+          <a:prstGeom prst="rect">
+            <a:avLst/>
+          </a:prstGeom>
+          <a:noFill/>
+        </p:spPr>
+        <p:txBody>
+          <a:bodyPr wrap="square" anchor="t">
+            <a:spAutoFit/>
+          </a:bodyPr>
+          <a:lstStyle/>
+          <a:p>
+            <a:pPr algn="ctr"/>
+            <a:r>
+              <a:rPr sz="4400" b="1">
+                <a:solidFill>
+                  <a:srgbClr val="215EA3"/>
+                </a:solidFill>
+                <a:latin typeface="Segoe UI"/>
+              </a:rPr>
+              <a:t>+10.3 pp</a:t>
+            </a:r>
+          </a:p>
+        </p:txBody>
+      </p:sp>
+      <p:sp>
+        <p:nvSpPr>
+          <p:cNvPr id="10" name="TextBox 9"/>
+          <p:cNvSpPr txBox="1"/>
+          <p:nvPr/>
+        </p:nvSpPr>
+        <p:spPr>
+          <a:xfrm>
+            <a:off x="4434840" y="3931920"/>
+            <a:ext cx="3566160" cy="457200"/>
+          </a:xfrm>
+          <a:prstGeom prst="rect">
+            <a:avLst/>
+          </a:prstGeom>
+          <a:noFill/>
+        </p:spPr>
+        <p:txBody>
+          <a:bodyPr wrap="square" anchor="t">
+            <a:spAutoFit/>
+          </a:bodyPr>
+          <a:lstStyle/>
+          <a:p>
+            <a:pPr algn="ctr"/>
+            <a:r>
+              <a:rPr sz="1500" b="0">
+                <a:solidFill>
+                  <a:srgbClr val="9DB0C8"/>
+                </a:solidFill>
+                <a:latin typeface="Segoe UI"/>
+              </a:rPr>
+              <a:t>tasa de conversión</a:t>
+            </a:r>
+          </a:p>
+        </p:txBody>
+      </p:sp>
+      <p:sp>
+        <p:nvSpPr>
+          <p:cNvPr id="11" name="Rounded Rectangle 10"/>
+          <p:cNvSpPr/>
+          <p:nvPr/>
+        </p:nvSpPr>
+        <p:spPr>
+          <a:xfrm>
+            <a:off x="8229600" y="2377440"/>
+            <a:ext cx="3566160" cy="2194560"/>
+          </a:xfrm>
+          <a:prstGeom prst="roundRect">
+            <a:avLst/>
+          </a:prstGeom>
+          <a:solidFill>
+            <a:srgbClr val="0E1E34"/>
+          </a:solidFill>
+          <a:ln w="12700">
+            <a:solidFill>
+              <a:srgbClr val="F2B441"/>
+            </a:solidFill>
+          </a:ln>
+          <a:effectLst/>
+        </p:spPr>
+        <p:style>
+          <a:lnRef idx="1">
+            <a:schemeClr val="accent1"/>
+          </a:lnRef>
+          <a:fillRef idx="3">
+            <a:schemeClr val="accent1"/>
+          </a:fillRef>
+          <a:effectRef idx="2">
+            <a:schemeClr val="accent1"/>
+          </a:effectRef>
+          <a:fontRef idx="minor">
+            <a:schemeClr val="lt1"/>
+          </a:fontRef>
+        </p:style>
+        <p:txBody>
+          <a:bodyPr rtlCol="0" anchor="ctr"/>
+          <a:lstStyle/>
+          <a:p>
+            <a:pPr algn="ctr"/>
+          </a:p>
+        </p:txBody>
+      </p:sp>
+      <p:sp>
+        <p:nvSpPr>
+          <p:cNvPr id="12" name="TextBox 11"/>
+          <p:cNvSpPr txBox="1"/>
+          <p:nvPr/>
+        </p:nvSpPr>
+        <p:spPr>
+          <a:xfrm>
+            <a:off x="8229600" y="2880360"/>
+            <a:ext cx="3566160" cy="914400"/>
+          </a:xfrm>
+          <a:prstGeom prst="rect">
+            <a:avLst/>
+          </a:prstGeom>
+          <a:noFill/>
+        </p:spPr>
+        <p:txBody>
+          <a:bodyPr wrap="square" anchor="t">
+            <a:spAutoFit/>
+          </a:bodyPr>
+          <a:lstStyle/>
+          <a:p>
+            <a:pPr algn="ctr"/>
+            <a:r>
+              <a:rPr sz="4400" b="1">
+                <a:solidFill>
+                  <a:srgbClr val="F2B441"/>
+                </a:solidFill>
+                <a:latin typeface="Segoe UI"/>
+              </a:rPr>
+              <a:t>+8.5 pp</a:t>
+            </a:r>
+          </a:p>
+        </p:txBody>
+      </p:sp>
+      <p:sp>
+        <p:nvSpPr>
+          <p:cNvPr id="13" name="TextBox 12"/>
+          <p:cNvSpPr txBox="1"/>
+          <p:nvPr/>
+        </p:nvSpPr>
+        <p:spPr>
+          <a:xfrm>
+            <a:off x="8229600" y="3931920"/>
+            <a:ext cx="3566160" cy="457200"/>
+          </a:xfrm>
+          <a:prstGeom prst="rect">
+            <a:avLst/>
+          </a:prstGeom>
+          <a:noFill/>
+        </p:spPr>
+        <p:txBody>
+          <a:bodyPr wrap="square" anchor="t">
+            <a:spAutoFit/>
+          </a:bodyPr>
+          <a:lstStyle/>
+          <a:p>
+            <a:pPr algn="ctr"/>
+            <a:r>
+              <a:rPr sz="1500" b="0">
+                <a:solidFill>
+                  <a:srgbClr val="9DB0C8"/>
+                </a:solidFill>
+                <a:latin typeface="Segoe UI"/>
+              </a:rPr>
+              <a:t>tasa de recupero</a:t>
+            </a:r>
+          </a:p>
+        </p:txBody>
+      </p:sp>
+      <p:sp>
+        <p:nvSpPr>
+          <p:cNvPr id="14" name="TextBox 13"/>
+          <p:cNvSpPr txBox="1"/>
+          <p:nvPr/>
+        </p:nvSpPr>
+        <p:spPr>
+          <a:xfrm>
+            <a:off x="822960" y="5120640"/>
+            <a:ext cx="10515600" cy="914400"/>
+          </a:xfrm>
+          <a:prstGeom prst="rect">
+            <a:avLst/>
+          </a:prstGeom>
+          <a:noFill/>
+        </p:spPr>
+        <p:txBody>
+          <a:bodyPr wrap="square" anchor="t">
+            <a:spAutoFit/>
+          </a:bodyPr>
+          <a:lstStyle/>
+          <a:p>
+            <a:pPr algn="ctr"/>
+            <a:r>
+              <a:rPr sz="1400" b="0">
+                <a:solidFill>
+                  <a:srgbClr val="EAF1FB"/>
+                </a:solidFill>
+                <a:latin typeface="Segoe UI"/>
+              </a:rPr>
+              <a:t>Con MV Kobra AI: calidad 74 · conversión 71% · recupero 46%   |   Sin MV Kobra AI: calidad 60 · conversión 61% · recupero 37%</a:t>
+            </a:r>
+          </a:p>
+        </p:txBody>
+      </p:sp>
+      <p:sp>
+        <p:nvSpPr>
+          <p:cNvPr id="15" name="TextBox 14"/>
+          <p:cNvSpPr txBox="1"/>
+          <p:nvPr/>
+        </p:nvSpPr>
+        <p:spPr>
+          <a:xfrm>
+            <a:off x="822960" y="5852160"/>
+            <a:ext cx="10515600" cy="548640"/>
+          </a:xfrm>
+          <a:prstGeom prst="rect">
+            <a:avLst/>
+          </a:prstGeom>
+          <a:noFill/>
+        </p:spPr>
+        <p:txBody>
+          <a:bodyPr wrap="square" anchor="t">
+            <a:spAutoFit/>
+          </a:bodyPr>
+          <a:lstStyle/>
+          <a:p>
+            <a:pPr algn="ctr"/>
+            <a:r>
+              <a:rPr sz="1400" b="0">
                 <a:solidFill>
                   <a:srgbClr val="00C896"/>
                 </a:solidFill>
                 <a:latin typeface="Segoe UI"/>
               </a:rPr>
-              <a:t>▸  Asistencia en vivo: análisis de sentimiento de voz/WhatsApp que guía al gestor en la negociación.</a:t>
-            </a:r>
-          </a:p>
-          <a:p>
-            <a:pPr>
-              <a:spcAft>
-                <a:spcPts val="1400"/>
-              </a:spcAft>
-            </a:pPr>
-            <a:r>
-              <a:rPr sz="1900">
-                <a:solidFill>
-                  <a:srgbClr val="00C896"/>
-                </a:solidFill>
-                <a:latin typeface="Segoe UI"/>
-              </a:rPr>
-              <a:t>▸  Menos costo: automatiza estrategia y guiones; el gestor solo ejecuta.</a:t>
-            </a:r>
-          </a:p>
-          <a:p>
-            <a:pPr>
-              <a:spcAft>
-                <a:spcPts val="1400"/>
-              </a:spcAft>
-            </a:pPr>
-            <a:r>
-              <a:rPr sz="1900">
-                <a:solidFill>
-                  <a:srgbClr val="00C896"/>
-                </a:solidFill>
-                <a:latin typeface="Segoe UI"/>
-              </a:rPr>
-              <a:t>▸  Decisiones con datos: ML de probabilidad de pago con selección de modelos y calibración.</a:t>
-            </a:r>
-          </a:p>
-          <a:p>
-            <a:pPr>
-              <a:spcAft>
-                <a:spcPts val="1400"/>
-              </a:spcAft>
-            </a:pPr>
-            <a:r>
-              <a:rPr sz="1900">
-                <a:solidFill>
-                  <a:srgbClr val="00C896"/>
-                </a:solidFill>
-                <a:latin typeface="Segoe UI"/>
-              </a:rPr>
-              <a:t>▸  Listo para Uruguay: pensado para el mercado local, sin datos personales sensibles.</a:t>
-            </a:r>
-          </a:p>
-          <a:p>
-            <a:pPr>
-              <a:spcAft>
-                <a:spcPts val="1400"/>
-              </a:spcAft>
-            </a:pPr>
-            <a:r>
-              <a:rPr sz="1900">
-                <a:solidFill>
-                  <a:srgbClr val="00C896"/>
-                </a:solidFill>
-                <a:latin typeface="Segoe UI"/>
-              </a:rPr>
-              <a:t>▸  Agnóstico de industria: banca, financieras, retail, telco, utilities, fintech.</a:t>
+              <a:t>En un piloto real, este mismo análisis (control vs. adopción) produce el impacto MEDIDO — esa es la evidencia que se presenta, no esta simulación.</a:t>
             </a:r>
           </a:p>
         </p:txBody>
@@ -4977,7 +4918,7 @@
                 </a:solidFill>
                 <a:latin typeface="Segoe UI"/>
               </a:rPr>
-              <a:t>Listo para producción</a:t>
+              <a:t>Por qué MV Kobra AI</a:t>
             </a:r>
           </a:p>
         </p:txBody>
@@ -5028,580 +4969,119 @@
       </p:sp>
       <p:sp>
         <p:nvSpPr>
-          <p:cNvPr id="4" name="Rounded Rectangle 3"/>
-          <p:cNvSpPr/>
+          <p:cNvPr id="4" name="TextBox 3"/>
+          <p:cNvSpPr txBox="1"/>
           <p:nvPr/>
         </p:nvSpPr>
         <p:spPr>
           <a:xfrm>
             <a:off x="822960" y="1828800"/>
-            <a:ext cx="4206240" cy="786384"/>
-          </a:xfrm>
-          <a:prstGeom prst="roundRect">
-            <a:avLst/>
-          </a:prstGeom>
-          <a:solidFill>
-            <a:srgbClr val="0E1E34"/>
-          </a:solidFill>
-          <a:ln w="12700">
-            <a:solidFill>
-              <a:srgbClr val="00C896"/>
-            </a:solidFill>
-          </a:ln>
-          <a:effectLst/>
-        </p:spPr>
-        <p:style>
-          <a:lnRef idx="1">
-            <a:schemeClr val="accent1"/>
-          </a:lnRef>
-          <a:fillRef idx="3">
-            <a:schemeClr val="accent1"/>
-          </a:fillRef>
-          <a:effectRef idx="2">
-            <a:schemeClr val="accent1"/>
-          </a:effectRef>
-          <a:fontRef idx="minor">
-            <a:schemeClr val="lt1"/>
-          </a:fontRef>
-        </p:style>
-        <p:txBody>
-          <a:bodyPr rtlCol="0" anchor="ctr"/>
-          <a:lstStyle/>
-          <a:p>
-            <a:pPr algn="ctr"/>
-          </a:p>
-        </p:txBody>
-      </p:sp>
-      <p:sp>
-        <p:nvSpPr>
-          <p:cNvPr id="5" name="TextBox 4"/>
-          <p:cNvSpPr txBox="1"/>
-          <p:nvPr/>
-        </p:nvSpPr>
-        <p:spPr>
-          <a:xfrm>
-            <a:off x="1005840" y="1975104"/>
-            <a:ext cx="3931920" cy="548640"/>
-          </a:xfrm>
-          <a:prstGeom prst="rect">
-            <a:avLst/>
-          </a:prstGeom>
-          <a:noFill/>
-        </p:spPr>
-        <p:txBody>
-          <a:bodyPr wrap="square" anchor="t">
-            <a:spAutoFit/>
-          </a:bodyPr>
-          <a:lstStyle/>
-          <a:p>
-            <a:pPr algn="l"/>
-            <a:r>
-              <a:rPr sz="1500" b="1">
+            <a:ext cx="10515600" cy="4114800"/>
+          </a:xfrm>
+          <a:prstGeom prst="rect">
+            <a:avLst/>
+          </a:prstGeom>
+          <a:noFill/>
+        </p:spPr>
+        <p:txBody>
+          <a:bodyPr wrap="square">
+            <a:spAutoFit/>
+          </a:bodyPr>
+          <a:lstStyle/>
+          <a:p>
+            <a:pPr>
+              <a:spcAft>
+                <a:spcPts val="1400"/>
+              </a:spcAft>
+            </a:pPr>
+            <a:r>
+              <a:rPr sz="1900">
                 <a:solidFill>
                   <a:srgbClr val="00C896"/>
                 </a:solidFill>
                 <a:latin typeface="Segoe UI"/>
               </a:rPr>
-              <a:t>🐳 Despliegue en 1 comando</a:t>
-            </a:r>
-          </a:p>
-        </p:txBody>
-      </p:sp>
-      <p:sp>
-        <p:nvSpPr>
-          <p:cNvPr id="6" name="TextBox 5"/>
-          <p:cNvSpPr txBox="1"/>
-          <p:nvPr/>
-        </p:nvSpPr>
-        <p:spPr>
-          <a:xfrm>
-            <a:off x="5303520" y="1920240"/>
-            <a:ext cx="6217920" cy="640080"/>
-          </a:xfrm>
-          <a:prstGeom prst="rect">
-            <a:avLst/>
-          </a:prstGeom>
-          <a:noFill/>
-        </p:spPr>
-        <p:txBody>
-          <a:bodyPr wrap="square" anchor="t">
-            <a:spAutoFit/>
-          </a:bodyPr>
-          <a:lstStyle/>
-          <a:p>
-            <a:pPr algn="l"/>
-            <a:r>
-              <a:rPr sz="1400" b="0">
-                <a:solidFill>
-                  <a:srgbClr val="EAF1FB"/>
-                </a:solidFill>
-                <a:latin typeface="Segoe UI"/>
-              </a:rPr>
-              <a:t>docker compose up: dashboard + servicio de audio en vivo, con datos y modelo autogenerados.</a:t>
-            </a:r>
-          </a:p>
-        </p:txBody>
-      </p:sp>
-      <p:sp>
-        <p:nvSpPr>
-          <p:cNvPr id="7" name="Rounded Rectangle 6"/>
-          <p:cNvSpPr/>
-          <p:nvPr/>
-        </p:nvSpPr>
-        <p:spPr>
-          <a:xfrm>
-            <a:off x="822960" y="2724912"/>
-            <a:ext cx="4206240" cy="786384"/>
-          </a:xfrm>
-          <a:prstGeom prst="roundRect">
-            <a:avLst/>
-          </a:prstGeom>
-          <a:solidFill>
-            <a:srgbClr val="0E1E34"/>
-          </a:solidFill>
-          <a:ln w="12700">
-            <a:solidFill>
-              <a:srgbClr val="00C896"/>
-            </a:solidFill>
-          </a:ln>
-          <a:effectLst/>
-        </p:spPr>
-        <p:style>
-          <a:lnRef idx="1">
-            <a:schemeClr val="accent1"/>
-          </a:lnRef>
-          <a:fillRef idx="3">
-            <a:schemeClr val="accent1"/>
-          </a:fillRef>
-          <a:effectRef idx="2">
-            <a:schemeClr val="accent1"/>
-          </a:effectRef>
-          <a:fontRef idx="minor">
-            <a:schemeClr val="lt1"/>
-          </a:fontRef>
-        </p:style>
-        <p:txBody>
-          <a:bodyPr rtlCol="0" anchor="ctr"/>
-          <a:lstStyle/>
-          <a:p>
-            <a:pPr algn="ctr"/>
-          </a:p>
-        </p:txBody>
-      </p:sp>
-      <p:sp>
-        <p:nvSpPr>
-          <p:cNvPr id="8" name="TextBox 7"/>
-          <p:cNvSpPr txBox="1"/>
-          <p:nvPr/>
-        </p:nvSpPr>
-        <p:spPr>
-          <a:xfrm>
-            <a:off x="1005840" y="2871216"/>
-            <a:ext cx="3931920" cy="548640"/>
-          </a:xfrm>
-          <a:prstGeom prst="rect">
-            <a:avLst/>
-          </a:prstGeom>
-          <a:noFill/>
-        </p:spPr>
-        <p:txBody>
-          <a:bodyPr wrap="square" anchor="t">
-            <a:spAutoFit/>
-          </a:bodyPr>
-          <a:lstStyle/>
-          <a:p>
-            <a:pPr algn="l"/>
-            <a:r>
-              <a:rPr sz="1500" b="1">
+              <a:t>▸  Más recupero: prioriza por valor esperado, no por antigüedad de la deuda.</a:t>
+            </a:r>
+          </a:p>
+          <a:p>
+            <a:pPr>
+              <a:spcAft>
+                <a:spcPts val="1400"/>
+              </a:spcAft>
+            </a:pPr>
+            <a:r>
+              <a:rPr sz="1900">
                 <a:solidFill>
                   <a:srgbClr val="00C896"/>
                 </a:solidFill>
                 <a:latin typeface="Segoe UI"/>
               </a:rPr>
-              <a:t>🔑 API keys persistentes</a:t>
-            </a:r>
-          </a:p>
-        </p:txBody>
-      </p:sp>
-      <p:sp>
-        <p:nvSpPr>
-          <p:cNvPr id="9" name="TextBox 8"/>
-          <p:cNvSpPr txBox="1"/>
-          <p:nvPr/>
-        </p:nvSpPr>
-        <p:spPr>
-          <a:xfrm>
-            <a:off x="5303520" y="2816352"/>
-            <a:ext cx="6217920" cy="640080"/>
-          </a:xfrm>
-          <a:prstGeom prst="rect">
-            <a:avLst/>
-          </a:prstGeom>
-          <a:noFill/>
-        </p:spPr>
-        <p:txBody>
-          <a:bodyPr wrap="square" anchor="t">
-            <a:spAutoFit/>
-          </a:bodyPr>
-          <a:lstStyle/>
-          <a:p>
-            <a:pPr algn="l"/>
-            <a:r>
-              <a:rPr sz="1400" b="0">
-                <a:solidFill>
-                  <a:srgbClr val="EAF1FB"/>
-                </a:solidFill>
-                <a:latin typeface="Segoe UI"/>
-              </a:rPr>
-              <a:t>Se cargan una vez desde la pestaña Configuración (o por variables de entorno) y quedan guardadas.</a:t>
-            </a:r>
-          </a:p>
-        </p:txBody>
-      </p:sp>
-      <p:sp>
-        <p:nvSpPr>
-          <p:cNvPr id="10" name="Rounded Rectangle 9"/>
-          <p:cNvSpPr/>
-          <p:nvPr/>
-        </p:nvSpPr>
-        <p:spPr>
-          <a:xfrm>
-            <a:off x="822960" y="3621024"/>
-            <a:ext cx="4206240" cy="786384"/>
-          </a:xfrm>
-          <a:prstGeom prst="roundRect">
-            <a:avLst/>
-          </a:prstGeom>
-          <a:solidFill>
-            <a:srgbClr val="0E1E34"/>
-          </a:solidFill>
-          <a:ln w="12700">
-            <a:solidFill>
-              <a:srgbClr val="00C896"/>
-            </a:solidFill>
-          </a:ln>
-          <a:effectLst/>
-        </p:spPr>
-        <p:style>
-          <a:lnRef idx="1">
-            <a:schemeClr val="accent1"/>
-          </a:lnRef>
-          <a:fillRef idx="3">
-            <a:schemeClr val="accent1"/>
-          </a:fillRef>
-          <a:effectRef idx="2">
-            <a:schemeClr val="accent1"/>
-          </a:effectRef>
-          <a:fontRef idx="minor">
-            <a:schemeClr val="lt1"/>
-          </a:fontRef>
-        </p:style>
-        <p:txBody>
-          <a:bodyPr rtlCol="0" anchor="ctr"/>
-          <a:lstStyle/>
-          <a:p>
-            <a:pPr algn="ctr"/>
-          </a:p>
-        </p:txBody>
-      </p:sp>
-      <p:sp>
-        <p:nvSpPr>
-          <p:cNvPr id="11" name="TextBox 10"/>
-          <p:cNvSpPr txBox="1"/>
-          <p:nvPr/>
-        </p:nvSpPr>
-        <p:spPr>
-          <a:xfrm>
-            <a:off x="1005840" y="3767328"/>
-            <a:ext cx="3931920" cy="548640"/>
-          </a:xfrm>
-          <a:prstGeom prst="rect">
-            <a:avLst/>
-          </a:prstGeom>
-          <a:noFill/>
-        </p:spPr>
-        <p:txBody>
-          <a:bodyPr wrap="square" anchor="t">
-            <a:spAutoFit/>
-          </a:bodyPr>
-          <a:lstStyle/>
-          <a:p>
-            <a:pPr algn="l"/>
-            <a:r>
-              <a:rPr sz="1500" b="1">
+              <a:t>▸  Asistencia en vivo: análisis de sentimiento de voz/WhatsApp que guía al gestor en la negociación.</a:t>
+            </a:r>
+          </a:p>
+          <a:p>
+            <a:pPr>
+              <a:spcAft>
+                <a:spcPts val="1400"/>
+              </a:spcAft>
+            </a:pPr>
+            <a:r>
+              <a:rPr sz="1900">
                 <a:solidFill>
                   <a:srgbClr val="00C896"/>
                 </a:solidFill>
                 <a:latin typeface="Segoe UI"/>
               </a:rPr>
-              <a:t>☎️ Integración telefónica</a:t>
-            </a:r>
-          </a:p>
-        </p:txBody>
-      </p:sp>
-      <p:sp>
-        <p:nvSpPr>
-          <p:cNvPr id="12" name="TextBox 11"/>
-          <p:cNvSpPr txBox="1"/>
-          <p:nvPr/>
-        </p:nvSpPr>
-        <p:spPr>
-          <a:xfrm>
-            <a:off x="5303520" y="3712464"/>
-            <a:ext cx="6217920" cy="640080"/>
-          </a:xfrm>
-          <a:prstGeom prst="rect">
-            <a:avLst/>
-          </a:prstGeom>
-          <a:noFill/>
-        </p:spPr>
-        <p:txBody>
-          <a:bodyPr wrap="square" anchor="t">
-            <a:spAutoFit/>
-          </a:bodyPr>
-          <a:lstStyle/>
-          <a:p>
-            <a:pPr algn="l"/>
-            <a:r>
-              <a:rPr sz="1400" b="0">
-                <a:solidFill>
-                  <a:srgbClr val="EAF1FB"/>
-                </a:solidFill>
-                <a:latin typeface="Segoe UI"/>
-              </a:rPr>
-              <a:t>Conectores para Avaya/Genesys/Twilio (SIPREC · Media Streams · DMCC) — grabación o streaming en vivo.</a:t>
-            </a:r>
-          </a:p>
-        </p:txBody>
-      </p:sp>
-      <p:sp>
-        <p:nvSpPr>
-          <p:cNvPr id="13" name="Rounded Rectangle 12"/>
-          <p:cNvSpPr/>
-          <p:nvPr/>
-        </p:nvSpPr>
-        <p:spPr>
-          <a:xfrm>
-            <a:off x="822960" y="4517136"/>
-            <a:ext cx="4206240" cy="786384"/>
-          </a:xfrm>
-          <a:prstGeom prst="roundRect">
-            <a:avLst/>
-          </a:prstGeom>
-          <a:solidFill>
-            <a:srgbClr val="0E1E34"/>
-          </a:solidFill>
-          <a:ln w="12700">
-            <a:solidFill>
-              <a:srgbClr val="00C896"/>
-            </a:solidFill>
-          </a:ln>
-          <a:effectLst/>
-        </p:spPr>
-        <p:style>
-          <a:lnRef idx="1">
-            <a:schemeClr val="accent1"/>
-          </a:lnRef>
-          <a:fillRef idx="3">
-            <a:schemeClr val="accent1"/>
-          </a:fillRef>
-          <a:effectRef idx="2">
-            <a:schemeClr val="accent1"/>
-          </a:effectRef>
-          <a:fontRef idx="minor">
-            <a:schemeClr val="lt1"/>
-          </a:fontRef>
-        </p:style>
-        <p:txBody>
-          <a:bodyPr rtlCol="0" anchor="ctr"/>
-          <a:lstStyle/>
-          <a:p>
-            <a:pPr algn="ctr"/>
-          </a:p>
-        </p:txBody>
-      </p:sp>
-      <p:sp>
-        <p:nvSpPr>
-          <p:cNvPr id="14" name="TextBox 13"/>
-          <p:cNvSpPr txBox="1"/>
-          <p:nvPr/>
-        </p:nvSpPr>
-        <p:spPr>
-          <a:xfrm>
-            <a:off x="1005840" y="4663440"/>
-            <a:ext cx="3931920" cy="548640"/>
-          </a:xfrm>
-          <a:prstGeom prst="rect">
-            <a:avLst/>
-          </a:prstGeom>
-          <a:noFill/>
-        </p:spPr>
-        <p:txBody>
-          <a:bodyPr wrap="square" anchor="t">
-            <a:spAutoFit/>
-          </a:bodyPr>
-          <a:lstStyle/>
-          <a:p>
-            <a:pPr algn="l"/>
-            <a:r>
-              <a:rPr sz="1500" b="1">
+              <a:t>▸  Menos costo: automatiza estrategia y guiones; el gestor solo ejecuta.</a:t>
+            </a:r>
+          </a:p>
+          <a:p>
+            <a:pPr>
+              <a:spcAft>
+                <a:spcPts val="1400"/>
+              </a:spcAft>
+            </a:pPr>
+            <a:r>
+              <a:rPr sz="1900">
                 <a:solidFill>
                   <a:srgbClr val="00C896"/>
                 </a:solidFill>
                 <a:latin typeface="Segoe UI"/>
               </a:rPr>
-              <a:t>✅ Calidad asegurada</a:t>
-            </a:r>
-          </a:p>
-        </p:txBody>
-      </p:sp>
-      <p:sp>
-        <p:nvSpPr>
-          <p:cNvPr id="15" name="TextBox 14"/>
-          <p:cNvSpPr txBox="1"/>
-          <p:nvPr/>
-        </p:nvSpPr>
-        <p:spPr>
-          <a:xfrm>
-            <a:off x="5303520" y="4608576"/>
-            <a:ext cx="6217920" cy="640080"/>
-          </a:xfrm>
-          <a:prstGeom prst="rect">
-            <a:avLst/>
-          </a:prstGeom>
-          <a:noFill/>
-        </p:spPr>
-        <p:txBody>
-          <a:bodyPr wrap="square" anchor="t">
-            <a:spAutoFit/>
-          </a:bodyPr>
-          <a:lstStyle/>
-          <a:p>
-            <a:pPr algn="l"/>
-            <a:r>
-              <a:rPr sz="1400" b="0">
-                <a:solidFill>
-                  <a:srgbClr val="EAF1FB"/>
-                </a:solidFill>
-                <a:latin typeface="Segoe UI"/>
-              </a:rPr>
-              <a:t>Suite de tests + CI (GitHub Actions) y reentrenamiento programado del modelo ProbPago.</a:t>
-            </a:r>
-          </a:p>
-        </p:txBody>
-      </p:sp>
-      <p:sp>
-        <p:nvSpPr>
-          <p:cNvPr id="16" name="Rounded Rectangle 15"/>
-          <p:cNvSpPr/>
-          <p:nvPr/>
-        </p:nvSpPr>
-        <p:spPr>
-          <a:xfrm>
-            <a:off x="822960" y="5413248"/>
-            <a:ext cx="4206240" cy="786384"/>
-          </a:xfrm>
-          <a:prstGeom prst="roundRect">
-            <a:avLst/>
-          </a:prstGeom>
-          <a:solidFill>
-            <a:srgbClr val="0E1E34"/>
-          </a:solidFill>
-          <a:ln w="12700">
-            <a:solidFill>
-              <a:srgbClr val="00C896"/>
-            </a:solidFill>
-          </a:ln>
-          <a:effectLst/>
-        </p:spPr>
-        <p:style>
-          <a:lnRef idx="1">
-            <a:schemeClr val="accent1"/>
-          </a:lnRef>
-          <a:fillRef idx="3">
-            <a:schemeClr val="accent1"/>
-          </a:fillRef>
-          <a:effectRef idx="2">
-            <a:schemeClr val="accent1"/>
-          </a:effectRef>
-          <a:fontRef idx="minor">
-            <a:schemeClr val="lt1"/>
-          </a:fontRef>
-        </p:style>
-        <p:txBody>
-          <a:bodyPr rtlCol="0" anchor="ctr"/>
-          <a:lstStyle/>
-          <a:p>
-            <a:pPr algn="ctr"/>
-          </a:p>
-        </p:txBody>
-      </p:sp>
-      <p:sp>
-        <p:nvSpPr>
-          <p:cNvPr id="17" name="TextBox 16"/>
-          <p:cNvSpPr txBox="1"/>
-          <p:nvPr/>
-        </p:nvSpPr>
-        <p:spPr>
-          <a:xfrm>
-            <a:off x="1005840" y="5559552"/>
-            <a:ext cx="3931920" cy="548640"/>
-          </a:xfrm>
-          <a:prstGeom prst="rect">
-            <a:avLst/>
-          </a:prstGeom>
-          <a:noFill/>
-        </p:spPr>
-        <p:txBody>
-          <a:bodyPr wrap="square" anchor="t">
-            <a:spAutoFit/>
-          </a:bodyPr>
-          <a:lstStyle/>
-          <a:p>
-            <a:pPr algn="l"/>
-            <a:r>
-              <a:rPr sz="1500" b="1">
+              <a:t>▸  Decisiones con datos: ML de probabilidad de pago con selección de modelos y calibración.</a:t>
+            </a:r>
+          </a:p>
+          <a:p>
+            <a:pPr>
+              <a:spcAft>
+                <a:spcPts val="1400"/>
+              </a:spcAft>
+            </a:pPr>
+            <a:r>
+              <a:rPr sz="1900">
                 <a:solidFill>
                   <a:srgbClr val="00C896"/>
                 </a:solidFill>
                 <a:latin typeface="Segoe UI"/>
               </a:rPr>
-              <a:t>🔒 Sin datos sensibles</a:t>
-            </a:r>
-          </a:p>
-        </p:txBody>
-      </p:sp>
-      <p:sp>
-        <p:nvSpPr>
-          <p:cNvPr id="18" name="TextBox 17"/>
-          <p:cNvSpPr txBox="1"/>
-          <p:nvPr/>
-        </p:nvSpPr>
-        <p:spPr>
-          <a:xfrm>
-            <a:off x="5303520" y="5504688"/>
-            <a:ext cx="6217920" cy="640080"/>
-          </a:xfrm>
-          <a:prstGeom prst="rect">
-            <a:avLst/>
-          </a:prstGeom>
-          <a:noFill/>
-        </p:spPr>
-        <p:txBody>
-          <a:bodyPr wrap="square" anchor="t">
-            <a:spAutoFit/>
-          </a:bodyPr>
-          <a:lstStyle/>
-          <a:p>
-            <a:pPr algn="l"/>
-            <a:r>
-              <a:rPr sz="1400" b="0">
-                <a:solidFill>
-                  <a:srgbClr val="EAF1FB"/>
-                </a:solidFill>
-                <a:latin typeface="Segoe UI"/>
-              </a:rPr>
-              <a:t>Dataset sintético, sin nombres de clientes. Reemplazable por la cartera real de la empresa.</a:t>
+              <a:t>▸  Listo para Uruguay: pensado para el mercado local, sin datos personales sensibles.</a:t>
+            </a:r>
+          </a:p>
+          <a:p>
+            <a:pPr>
+              <a:spcAft>
+                <a:spcPts val="1400"/>
+              </a:spcAft>
+            </a:pPr>
+            <a:r>
+              <a:rPr sz="1900">
+                <a:solidFill>
+                  <a:srgbClr val="00C896"/>
+                </a:solidFill>
+                <a:latin typeface="Segoe UI"/>
+              </a:rPr>
+              <a:t>▸  Agnóstico de industria: banca, financieras, retail, telco, utilities, fintech.</a:t>
             </a:r>
           </a:p>
         </p:txBody>
@@ -5632,6 +5112,691 @@
         <p:nvPr/>
       </p:nvGrpSpPr>
       <p:grpSpPr/>
+      <p:sp>
+        <p:nvSpPr>
+          <p:cNvPr id="2" name="TextBox 1"/>
+          <p:cNvSpPr txBox="1"/>
+          <p:nvPr/>
+        </p:nvSpPr>
+        <p:spPr>
+          <a:xfrm>
+            <a:off x="640080" y="457200"/>
+            <a:ext cx="10972800" cy="731520"/>
+          </a:xfrm>
+          <a:prstGeom prst="rect">
+            <a:avLst/>
+          </a:prstGeom>
+          <a:noFill/>
+        </p:spPr>
+        <p:txBody>
+          <a:bodyPr wrap="square" anchor="t">
+            <a:spAutoFit/>
+          </a:bodyPr>
+          <a:lstStyle/>
+          <a:p>
+            <a:pPr algn="l"/>
+            <a:r>
+              <a:rPr sz="3200" b="1">
+                <a:solidFill>
+                  <a:srgbClr val="EAF1FB"/>
+                </a:solidFill>
+                <a:latin typeface="Segoe UI"/>
+              </a:rPr>
+              <a:t>Listo para producción</a:t>
+            </a:r>
+          </a:p>
+        </p:txBody>
+      </p:sp>
+      <p:sp>
+        <p:nvSpPr>
+          <p:cNvPr id="3" name="Rounded Rectangle 2"/>
+          <p:cNvSpPr/>
+          <p:nvPr/>
+        </p:nvSpPr>
+        <p:spPr>
+          <a:xfrm>
+            <a:off x="640080" y="1280160"/>
+            <a:ext cx="137160" cy="640080"/>
+          </a:xfrm>
+          <a:prstGeom prst="roundRect">
+            <a:avLst/>
+          </a:prstGeom>
+          <a:solidFill>
+            <a:srgbClr val="00C896"/>
+          </a:solidFill>
+          <a:ln>
+            <a:noFill/>
+          </a:ln>
+          <a:effectLst/>
+        </p:spPr>
+        <p:style>
+          <a:lnRef idx="1">
+            <a:schemeClr val="accent1"/>
+          </a:lnRef>
+          <a:fillRef idx="3">
+            <a:schemeClr val="accent1"/>
+          </a:fillRef>
+          <a:effectRef idx="2">
+            <a:schemeClr val="accent1"/>
+          </a:effectRef>
+          <a:fontRef idx="minor">
+            <a:schemeClr val="lt1"/>
+          </a:fontRef>
+        </p:style>
+        <p:txBody>
+          <a:bodyPr rtlCol="0" anchor="ctr"/>
+          <a:lstStyle/>
+          <a:p>
+            <a:pPr algn="ctr"/>
+          </a:p>
+        </p:txBody>
+      </p:sp>
+      <p:sp>
+        <p:nvSpPr>
+          <p:cNvPr id="4" name="Rounded Rectangle 3"/>
+          <p:cNvSpPr/>
+          <p:nvPr/>
+        </p:nvSpPr>
+        <p:spPr>
+          <a:xfrm>
+            <a:off x="822960" y="1828800"/>
+            <a:ext cx="4206240" cy="786384"/>
+          </a:xfrm>
+          <a:prstGeom prst="roundRect">
+            <a:avLst/>
+          </a:prstGeom>
+          <a:solidFill>
+            <a:srgbClr val="0E1E34"/>
+          </a:solidFill>
+          <a:ln w="12700">
+            <a:solidFill>
+              <a:srgbClr val="00C896"/>
+            </a:solidFill>
+          </a:ln>
+          <a:effectLst/>
+        </p:spPr>
+        <p:style>
+          <a:lnRef idx="1">
+            <a:schemeClr val="accent1"/>
+          </a:lnRef>
+          <a:fillRef idx="3">
+            <a:schemeClr val="accent1"/>
+          </a:fillRef>
+          <a:effectRef idx="2">
+            <a:schemeClr val="accent1"/>
+          </a:effectRef>
+          <a:fontRef idx="minor">
+            <a:schemeClr val="lt1"/>
+          </a:fontRef>
+        </p:style>
+        <p:txBody>
+          <a:bodyPr rtlCol="0" anchor="ctr"/>
+          <a:lstStyle/>
+          <a:p>
+            <a:pPr algn="ctr"/>
+          </a:p>
+        </p:txBody>
+      </p:sp>
+      <p:sp>
+        <p:nvSpPr>
+          <p:cNvPr id="5" name="TextBox 4"/>
+          <p:cNvSpPr txBox="1"/>
+          <p:nvPr/>
+        </p:nvSpPr>
+        <p:spPr>
+          <a:xfrm>
+            <a:off x="1005840" y="1975104"/>
+            <a:ext cx="3931920" cy="548640"/>
+          </a:xfrm>
+          <a:prstGeom prst="rect">
+            <a:avLst/>
+          </a:prstGeom>
+          <a:noFill/>
+        </p:spPr>
+        <p:txBody>
+          <a:bodyPr wrap="square" anchor="t">
+            <a:spAutoFit/>
+          </a:bodyPr>
+          <a:lstStyle/>
+          <a:p>
+            <a:pPr algn="l"/>
+            <a:r>
+              <a:rPr sz="1500" b="1">
+                <a:solidFill>
+                  <a:srgbClr val="00C896"/>
+                </a:solidFill>
+                <a:latin typeface="Segoe UI"/>
+              </a:rPr>
+              <a:t>🐳 Despliegue en 1 comando</a:t>
+            </a:r>
+          </a:p>
+        </p:txBody>
+      </p:sp>
+      <p:sp>
+        <p:nvSpPr>
+          <p:cNvPr id="6" name="TextBox 5"/>
+          <p:cNvSpPr txBox="1"/>
+          <p:nvPr/>
+        </p:nvSpPr>
+        <p:spPr>
+          <a:xfrm>
+            <a:off x="5303520" y="1920240"/>
+            <a:ext cx="6217920" cy="640080"/>
+          </a:xfrm>
+          <a:prstGeom prst="rect">
+            <a:avLst/>
+          </a:prstGeom>
+          <a:noFill/>
+        </p:spPr>
+        <p:txBody>
+          <a:bodyPr wrap="square" anchor="t">
+            <a:spAutoFit/>
+          </a:bodyPr>
+          <a:lstStyle/>
+          <a:p>
+            <a:pPr algn="l"/>
+            <a:r>
+              <a:rPr sz="1400" b="0">
+                <a:solidFill>
+                  <a:srgbClr val="EAF1FB"/>
+                </a:solidFill>
+                <a:latin typeface="Segoe UI"/>
+              </a:rPr>
+              <a:t>docker compose up: dashboard + servicio de audio en vivo, con datos y modelo autogenerados.</a:t>
+            </a:r>
+          </a:p>
+        </p:txBody>
+      </p:sp>
+      <p:sp>
+        <p:nvSpPr>
+          <p:cNvPr id="7" name="Rounded Rectangle 6"/>
+          <p:cNvSpPr/>
+          <p:nvPr/>
+        </p:nvSpPr>
+        <p:spPr>
+          <a:xfrm>
+            <a:off x="822960" y="2724912"/>
+            <a:ext cx="4206240" cy="786384"/>
+          </a:xfrm>
+          <a:prstGeom prst="roundRect">
+            <a:avLst/>
+          </a:prstGeom>
+          <a:solidFill>
+            <a:srgbClr val="0E1E34"/>
+          </a:solidFill>
+          <a:ln w="12700">
+            <a:solidFill>
+              <a:srgbClr val="00C896"/>
+            </a:solidFill>
+          </a:ln>
+          <a:effectLst/>
+        </p:spPr>
+        <p:style>
+          <a:lnRef idx="1">
+            <a:schemeClr val="accent1"/>
+          </a:lnRef>
+          <a:fillRef idx="3">
+            <a:schemeClr val="accent1"/>
+          </a:fillRef>
+          <a:effectRef idx="2">
+            <a:schemeClr val="accent1"/>
+          </a:effectRef>
+          <a:fontRef idx="minor">
+            <a:schemeClr val="lt1"/>
+          </a:fontRef>
+        </p:style>
+        <p:txBody>
+          <a:bodyPr rtlCol="0" anchor="ctr"/>
+          <a:lstStyle/>
+          <a:p>
+            <a:pPr algn="ctr"/>
+          </a:p>
+        </p:txBody>
+      </p:sp>
+      <p:sp>
+        <p:nvSpPr>
+          <p:cNvPr id="8" name="TextBox 7"/>
+          <p:cNvSpPr txBox="1"/>
+          <p:nvPr/>
+        </p:nvSpPr>
+        <p:spPr>
+          <a:xfrm>
+            <a:off x="1005840" y="2871216"/>
+            <a:ext cx="3931920" cy="548640"/>
+          </a:xfrm>
+          <a:prstGeom prst="rect">
+            <a:avLst/>
+          </a:prstGeom>
+          <a:noFill/>
+        </p:spPr>
+        <p:txBody>
+          <a:bodyPr wrap="square" anchor="t">
+            <a:spAutoFit/>
+          </a:bodyPr>
+          <a:lstStyle/>
+          <a:p>
+            <a:pPr algn="l"/>
+            <a:r>
+              <a:rPr sz="1500" b="1">
+                <a:solidFill>
+                  <a:srgbClr val="00C896"/>
+                </a:solidFill>
+                <a:latin typeface="Segoe UI"/>
+              </a:rPr>
+              <a:t>🔑 API keys persistentes</a:t>
+            </a:r>
+          </a:p>
+        </p:txBody>
+      </p:sp>
+      <p:sp>
+        <p:nvSpPr>
+          <p:cNvPr id="9" name="TextBox 8"/>
+          <p:cNvSpPr txBox="1"/>
+          <p:nvPr/>
+        </p:nvSpPr>
+        <p:spPr>
+          <a:xfrm>
+            <a:off x="5303520" y="2816352"/>
+            <a:ext cx="6217920" cy="640080"/>
+          </a:xfrm>
+          <a:prstGeom prst="rect">
+            <a:avLst/>
+          </a:prstGeom>
+          <a:noFill/>
+        </p:spPr>
+        <p:txBody>
+          <a:bodyPr wrap="square" anchor="t">
+            <a:spAutoFit/>
+          </a:bodyPr>
+          <a:lstStyle/>
+          <a:p>
+            <a:pPr algn="l"/>
+            <a:r>
+              <a:rPr sz="1400" b="0">
+                <a:solidFill>
+                  <a:srgbClr val="EAF1FB"/>
+                </a:solidFill>
+                <a:latin typeface="Segoe UI"/>
+              </a:rPr>
+              <a:t>Se cargan una vez desde la pestaña Configuración (o por variables de entorno) y quedan guardadas.</a:t>
+            </a:r>
+          </a:p>
+        </p:txBody>
+      </p:sp>
+      <p:sp>
+        <p:nvSpPr>
+          <p:cNvPr id="10" name="Rounded Rectangle 9"/>
+          <p:cNvSpPr/>
+          <p:nvPr/>
+        </p:nvSpPr>
+        <p:spPr>
+          <a:xfrm>
+            <a:off x="822960" y="3621024"/>
+            <a:ext cx="4206240" cy="786384"/>
+          </a:xfrm>
+          <a:prstGeom prst="roundRect">
+            <a:avLst/>
+          </a:prstGeom>
+          <a:solidFill>
+            <a:srgbClr val="0E1E34"/>
+          </a:solidFill>
+          <a:ln w="12700">
+            <a:solidFill>
+              <a:srgbClr val="00C896"/>
+            </a:solidFill>
+          </a:ln>
+          <a:effectLst/>
+        </p:spPr>
+        <p:style>
+          <a:lnRef idx="1">
+            <a:schemeClr val="accent1"/>
+          </a:lnRef>
+          <a:fillRef idx="3">
+            <a:schemeClr val="accent1"/>
+          </a:fillRef>
+          <a:effectRef idx="2">
+            <a:schemeClr val="accent1"/>
+          </a:effectRef>
+          <a:fontRef idx="minor">
+            <a:schemeClr val="lt1"/>
+          </a:fontRef>
+        </p:style>
+        <p:txBody>
+          <a:bodyPr rtlCol="0" anchor="ctr"/>
+          <a:lstStyle/>
+          <a:p>
+            <a:pPr algn="ctr"/>
+          </a:p>
+        </p:txBody>
+      </p:sp>
+      <p:sp>
+        <p:nvSpPr>
+          <p:cNvPr id="11" name="TextBox 10"/>
+          <p:cNvSpPr txBox="1"/>
+          <p:nvPr/>
+        </p:nvSpPr>
+        <p:spPr>
+          <a:xfrm>
+            <a:off x="1005840" y="3767328"/>
+            <a:ext cx="3931920" cy="548640"/>
+          </a:xfrm>
+          <a:prstGeom prst="rect">
+            <a:avLst/>
+          </a:prstGeom>
+          <a:noFill/>
+        </p:spPr>
+        <p:txBody>
+          <a:bodyPr wrap="square" anchor="t">
+            <a:spAutoFit/>
+          </a:bodyPr>
+          <a:lstStyle/>
+          <a:p>
+            <a:pPr algn="l"/>
+            <a:r>
+              <a:rPr sz="1500" b="1">
+                <a:solidFill>
+                  <a:srgbClr val="00C896"/>
+                </a:solidFill>
+                <a:latin typeface="Segoe UI"/>
+              </a:rPr>
+              <a:t>☎️ Integración telefónica</a:t>
+            </a:r>
+          </a:p>
+        </p:txBody>
+      </p:sp>
+      <p:sp>
+        <p:nvSpPr>
+          <p:cNvPr id="12" name="TextBox 11"/>
+          <p:cNvSpPr txBox="1"/>
+          <p:nvPr/>
+        </p:nvSpPr>
+        <p:spPr>
+          <a:xfrm>
+            <a:off x="5303520" y="3712464"/>
+            <a:ext cx="6217920" cy="640080"/>
+          </a:xfrm>
+          <a:prstGeom prst="rect">
+            <a:avLst/>
+          </a:prstGeom>
+          <a:noFill/>
+        </p:spPr>
+        <p:txBody>
+          <a:bodyPr wrap="square" anchor="t">
+            <a:spAutoFit/>
+          </a:bodyPr>
+          <a:lstStyle/>
+          <a:p>
+            <a:pPr algn="l"/>
+            <a:r>
+              <a:rPr sz="1400" b="0">
+                <a:solidFill>
+                  <a:srgbClr val="EAF1FB"/>
+                </a:solidFill>
+                <a:latin typeface="Segoe UI"/>
+              </a:rPr>
+              <a:t>Conectores para Avaya/Genesys/Twilio (SIPREC · Media Streams · DMCC) — grabación o streaming en vivo.</a:t>
+            </a:r>
+          </a:p>
+        </p:txBody>
+      </p:sp>
+      <p:sp>
+        <p:nvSpPr>
+          <p:cNvPr id="13" name="Rounded Rectangle 12"/>
+          <p:cNvSpPr/>
+          <p:nvPr/>
+        </p:nvSpPr>
+        <p:spPr>
+          <a:xfrm>
+            <a:off x="822960" y="4517136"/>
+            <a:ext cx="4206240" cy="786384"/>
+          </a:xfrm>
+          <a:prstGeom prst="roundRect">
+            <a:avLst/>
+          </a:prstGeom>
+          <a:solidFill>
+            <a:srgbClr val="0E1E34"/>
+          </a:solidFill>
+          <a:ln w="12700">
+            <a:solidFill>
+              <a:srgbClr val="00C896"/>
+            </a:solidFill>
+          </a:ln>
+          <a:effectLst/>
+        </p:spPr>
+        <p:style>
+          <a:lnRef idx="1">
+            <a:schemeClr val="accent1"/>
+          </a:lnRef>
+          <a:fillRef idx="3">
+            <a:schemeClr val="accent1"/>
+          </a:fillRef>
+          <a:effectRef idx="2">
+            <a:schemeClr val="accent1"/>
+          </a:effectRef>
+          <a:fontRef idx="minor">
+            <a:schemeClr val="lt1"/>
+          </a:fontRef>
+        </p:style>
+        <p:txBody>
+          <a:bodyPr rtlCol="0" anchor="ctr"/>
+          <a:lstStyle/>
+          <a:p>
+            <a:pPr algn="ctr"/>
+          </a:p>
+        </p:txBody>
+      </p:sp>
+      <p:sp>
+        <p:nvSpPr>
+          <p:cNvPr id="14" name="TextBox 13"/>
+          <p:cNvSpPr txBox="1"/>
+          <p:nvPr/>
+        </p:nvSpPr>
+        <p:spPr>
+          <a:xfrm>
+            <a:off x="1005840" y="4663440"/>
+            <a:ext cx="3931920" cy="548640"/>
+          </a:xfrm>
+          <a:prstGeom prst="rect">
+            <a:avLst/>
+          </a:prstGeom>
+          <a:noFill/>
+        </p:spPr>
+        <p:txBody>
+          <a:bodyPr wrap="square" anchor="t">
+            <a:spAutoFit/>
+          </a:bodyPr>
+          <a:lstStyle/>
+          <a:p>
+            <a:pPr algn="l"/>
+            <a:r>
+              <a:rPr sz="1500" b="1">
+                <a:solidFill>
+                  <a:srgbClr val="00C896"/>
+                </a:solidFill>
+                <a:latin typeface="Segoe UI"/>
+              </a:rPr>
+              <a:t>✅ Calidad asegurada</a:t>
+            </a:r>
+          </a:p>
+        </p:txBody>
+      </p:sp>
+      <p:sp>
+        <p:nvSpPr>
+          <p:cNvPr id="15" name="TextBox 14"/>
+          <p:cNvSpPr txBox="1"/>
+          <p:nvPr/>
+        </p:nvSpPr>
+        <p:spPr>
+          <a:xfrm>
+            <a:off x="5303520" y="4608576"/>
+            <a:ext cx="6217920" cy="640080"/>
+          </a:xfrm>
+          <a:prstGeom prst="rect">
+            <a:avLst/>
+          </a:prstGeom>
+          <a:noFill/>
+        </p:spPr>
+        <p:txBody>
+          <a:bodyPr wrap="square" anchor="t">
+            <a:spAutoFit/>
+          </a:bodyPr>
+          <a:lstStyle/>
+          <a:p>
+            <a:pPr algn="l"/>
+            <a:r>
+              <a:rPr sz="1400" b="0">
+                <a:solidFill>
+                  <a:srgbClr val="EAF1FB"/>
+                </a:solidFill>
+                <a:latin typeface="Segoe UI"/>
+              </a:rPr>
+              <a:t>Suite de tests + CI (GitHub Actions) y reentrenamiento programado del modelo ProbPago.</a:t>
+            </a:r>
+          </a:p>
+        </p:txBody>
+      </p:sp>
+      <p:sp>
+        <p:nvSpPr>
+          <p:cNvPr id="16" name="Rounded Rectangle 15"/>
+          <p:cNvSpPr/>
+          <p:nvPr/>
+        </p:nvSpPr>
+        <p:spPr>
+          <a:xfrm>
+            <a:off x="822960" y="5413248"/>
+            <a:ext cx="4206240" cy="786384"/>
+          </a:xfrm>
+          <a:prstGeom prst="roundRect">
+            <a:avLst/>
+          </a:prstGeom>
+          <a:solidFill>
+            <a:srgbClr val="0E1E34"/>
+          </a:solidFill>
+          <a:ln w="12700">
+            <a:solidFill>
+              <a:srgbClr val="00C896"/>
+            </a:solidFill>
+          </a:ln>
+          <a:effectLst/>
+        </p:spPr>
+        <p:style>
+          <a:lnRef idx="1">
+            <a:schemeClr val="accent1"/>
+          </a:lnRef>
+          <a:fillRef idx="3">
+            <a:schemeClr val="accent1"/>
+          </a:fillRef>
+          <a:effectRef idx="2">
+            <a:schemeClr val="accent1"/>
+          </a:effectRef>
+          <a:fontRef idx="minor">
+            <a:schemeClr val="lt1"/>
+          </a:fontRef>
+        </p:style>
+        <p:txBody>
+          <a:bodyPr rtlCol="0" anchor="ctr"/>
+          <a:lstStyle/>
+          <a:p>
+            <a:pPr algn="ctr"/>
+          </a:p>
+        </p:txBody>
+      </p:sp>
+      <p:sp>
+        <p:nvSpPr>
+          <p:cNvPr id="17" name="TextBox 16"/>
+          <p:cNvSpPr txBox="1"/>
+          <p:nvPr/>
+        </p:nvSpPr>
+        <p:spPr>
+          <a:xfrm>
+            <a:off x="1005840" y="5559552"/>
+            <a:ext cx="3931920" cy="548640"/>
+          </a:xfrm>
+          <a:prstGeom prst="rect">
+            <a:avLst/>
+          </a:prstGeom>
+          <a:noFill/>
+        </p:spPr>
+        <p:txBody>
+          <a:bodyPr wrap="square" anchor="t">
+            <a:spAutoFit/>
+          </a:bodyPr>
+          <a:lstStyle/>
+          <a:p>
+            <a:pPr algn="l"/>
+            <a:r>
+              <a:rPr sz="1500" b="1">
+                <a:solidFill>
+                  <a:srgbClr val="00C896"/>
+                </a:solidFill>
+                <a:latin typeface="Segoe UI"/>
+              </a:rPr>
+              <a:t>🔒 Sin datos sensibles</a:t>
+            </a:r>
+          </a:p>
+        </p:txBody>
+      </p:sp>
+      <p:sp>
+        <p:nvSpPr>
+          <p:cNvPr id="18" name="TextBox 17"/>
+          <p:cNvSpPr txBox="1"/>
+          <p:nvPr/>
+        </p:nvSpPr>
+        <p:spPr>
+          <a:xfrm>
+            <a:off x="5303520" y="5504688"/>
+            <a:ext cx="6217920" cy="640080"/>
+          </a:xfrm>
+          <a:prstGeom prst="rect">
+            <a:avLst/>
+          </a:prstGeom>
+          <a:noFill/>
+        </p:spPr>
+        <p:txBody>
+          <a:bodyPr wrap="square" anchor="t">
+            <a:spAutoFit/>
+          </a:bodyPr>
+          <a:lstStyle/>
+          <a:p>
+            <a:pPr algn="l"/>
+            <a:r>
+              <a:rPr sz="1400" b="0">
+                <a:solidFill>
+                  <a:srgbClr val="EAF1FB"/>
+                </a:solidFill>
+                <a:latin typeface="Segoe UI"/>
+              </a:rPr>
+              <a:t>Dataset sintético, sin nombres de clientes. Reemplazable por la cartera real de la empresa.</a:t>
+            </a:r>
+          </a:p>
+        </p:txBody>
+      </p:sp>
+    </p:spTree>
+  </p:cSld>
+  <p:clrMapOvr>
+    <a:masterClrMapping/>
+  </p:clrMapOvr>
+</p:sld>
+</file>
+
+<file path=ppt/slides/slide19.xml><?xml version="1.0" encoding="utf-8"?>
+<p:sld xmlns:a="http://schemas.openxmlformats.org/drawingml/2006/main" xmlns:p="http://schemas.openxmlformats.org/presentationml/2006/main" xmlns:r="http://schemas.openxmlformats.org/officeDocument/2006/relationships">
+  <p:cSld>
+    <p:bg>
+      <p:bgPr>
+        <a:solidFill>
+          <a:srgbClr val="081527"/>
+        </a:solidFill>
+        <a:effectLst/>
+      </p:bgPr>
+    </p:bg>
+    <p:spTree>
+      <p:nvGrpSpPr>
+        <p:cNvPr id="1" name=""/>
+        <p:cNvGrpSpPr/>
+        <p:nvPr/>
+      </p:nvGrpSpPr>
+      <p:grpSpPr/>
       <p:pic>
         <p:nvPicPr>
           <p:cNvPr id="2" name="Picture 1" descr="mv_icon.png"/>
@@ -6279,7 +6444,7 @@
           </a:solidFill>
           <a:ln w="12700">
             <a:solidFill>
-              <a:srgbClr val="2F74C0"/>
+              <a:srgbClr val="215EA3"/>
             </a:solidFill>
           </a:ln>
           <a:effectLst/>
@@ -6332,7 +6497,7 @@
             <a:r>
               <a:rPr sz="2200" b="1">
                 <a:solidFill>
-                  <a:srgbClr val="2F74C0"/>
+                  <a:srgbClr val="215EA3"/>
                 </a:solidFill>
                 <a:latin typeface="Segoe UI"/>
               </a:rPr>
@@ -6402,7 +6567,7 @@
             <a:r>
               <a:rPr sz="1300" b="1">
                 <a:solidFill>
-                  <a:srgbClr val="2F74C0"/>
+                  <a:srgbClr val="215EA3"/>
                 </a:solidFill>
                 <a:latin typeface="Segoe UI"/>
               </a:rPr>
@@ -6802,7 +6967,7 @@
           </a:solidFill>
           <a:ln w="12700">
             <a:solidFill>
-              <a:srgbClr val="2F74C0"/>
+              <a:srgbClr val="215EA3"/>
             </a:solidFill>
           </a:ln>
           <a:effectLst/>
@@ -6855,7 +7020,7 @@
             <a:r>
               <a:rPr sz="1700" b="1">
                 <a:solidFill>
-                  <a:srgbClr val="2F74C0"/>
+                  <a:srgbClr val="215EA3"/>
                 </a:solidFill>
                 <a:latin typeface="Segoe UI"/>
               </a:rPr>
@@ -7150,7 +7315,7 @@
           </a:solidFill>
           <a:ln w="12700">
             <a:solidFill>
-              <a:srgbClr val="2F74C0"/>
+              <a:srgbClr val="215EA3"/>
             </a:solidFill>
           </a:ln>
           <a:effectLst/>
@@ -7203,7 +7368,7 @@
             <a:r>
               <a:rPr sz="1700" b="1">
                 <a:solidFill>
-                  <a:srgbClr val="2F74C0"/>
+                  <a:srgbClr val="215EA3"/>
                 </a:solidFill>
                 <a:latin typeface="Segoe UI"/>
               </a:rPr>
@@ -7764,7 +7929,7 @@
             <a:r>
               <a:rPr sz="3400" b="1">
                 <a:solidFill>
-                  <a:srgbClr val="2F74C0"/>
+                  <a:srgbClr val="215EA3"/>
                 </a:solidFill>
                 <a:latin typeface="Segoe UI"/>
               </a:rPr>
@@ -8099,93 +8264,58 @@
       <p:grpSpPr/>
       <p:sp>
         <p:nvSpPr>
-          <p:cNvPr id="2" name="TextBox 1"/>
-          <p:cNvSpPr txBox="1"/>
-          <p:nvPr/>
-        </p:nvSpPr>
-        <p:spPr>
-          <a:xfrm>
-            <a:off x="640080" y="320040"/>
-            <a:ext cx="10972800" cy="640080"/>
-          </a:xfrm>
-          <a:prstGeom prst="rect">
-            <a:avLst/>
-          </a:prstGeom>
-          <a:noFill/>
-        </p:spPr>
-        <p:txBody>
-          <a:bodyPr wrap="square" anchor="t">
+          <p:cNvPr id="2" name="frescura_titulo"/>
+          <p:cNvSpPr txBox="1"/>
+          <p:nvPr/>
+        </p:nvSpPr>
+        <p:spPr>
+          <a:xfrm>
+            <a:off x="640080" y="292608"/>
+            <a:ext cx="10911535" cy="640080"/>
+          </a:xfrm>
+          <a:prstGeom prst="rect">
+            <a:avLst/>
+          </a:prstGeom>
+          <a:noFill/>
+        </p:spPr>
+        <p:txBody>
+          <a:bodyPr wrap="square" anchor="ctr" lIns="73152" rIns="73152" tIns="18288" bIns="18288">
             <a:spAutoFit/>
           </a:bodyPr>
           <a:lstStyle/>
           <a:p>
             <a:pPr algn="l"/>
             <a:r>
-              <a:rPr sz="2800" b="1">
-                <a:solidFill>
-                  <a:srgbClr val="00C896"/>
-                </a:solidFill>
-                <a:latin typeface="Segoe UI"/>
-              </a:rPr>
-              <a:t>Dashboard · Visión general</a:t>
-            </a:r>
-          </a:p>
-        </p:txBody>
-      </p:sp>
-      <p:sp>
-        <p:nvSpPr>
-          <p:cNvPr id="3" name="TextBox 2"/>
-          <p:cNvSpPr txBox="1"/>
-          <p:nvPr/>
-        </p:nvSpPr>
-        <p:spPr>
-          <a:xfrm>
-            <a:off x="640080" y="914400"/>
-            <a:ext cx="10972800" cy="457200"/>
-          </a:xfrm>
-          <a:prstGeom prst="rect">
-            <a:avLst/>
-          </a:prstGeom>
-          <a:noFill/>
-        </p:spPr>
-        <p:txBody>
-          <a:bodyPr wrap="square" anchor="t">
-            <a:spAutoFit/>
-          </a:bodyPr>
-          <a:lstStyle/>
-          <a:p>
-            <a:pPr algn="l"/>
-            <a:r>
-              <a:rPr sz="1500" b="0">
-                <a:solidFill>
-                  <a:srgbClr val="9DB0C8"/>
-                </a:solidFill>
-                <a:latin typeface="Segoe UI"/>
-              </a:rPr>
-              <a:t>KPIs en vivo, filtros dinámicos y gráficos de cartera vs. recupero.</a:t>
-            </a:r>
-          </a:p>
-        </p:txBody>
-      </p:sp>
-      <p:sp>
-        <p:nvSpPr>
-          <p:cNvPr id="4" name="Rounded Rectangle 3"/>
+              <a:rPr sz="3000" b="1">
+                <a:solidFill>
+                  <a:srgbClr val="EAF1FB"/>
+                </a:solidFill>
+                <a:latin typeface="Segoe UI"/>
+              </a:rPr>
+              <a:t>Frescura de los datos</a:t>
+            </a:r>
+          </a:p>
+        </p:txBody>
+      </p:sp>
+      <p:sp>
+        <p:nvSpPr>
+          <p:cNvPr id="3" name="Rectangle 2"/>
           <p:cNvSpPr/>
           <p:nvPr/>
         </p:nvSpPr>
         <p:spPr>
           <a:xfrm>
-            <a:off x="502920" y="1417320"/>
-            <a:ext cx="11201400" cy="5074920"/>
-          </a:xfrm>
-          <a:prstGeom prst="roundRect">
-            <a:avLst/>
-          </a:prstGeom>
-          <a:noFill/>
-          <a:ln w="12700">
-            <a:solidFill>
-              <a:srgbClr val="2F74C0"/>
-            </a:solidFill>
+            <a:off x="640080" y="960120"/>
+            <a:ext cx="137160" cy="329184"/>
+          </a:xfrm>
+          <a:prstGeom prst="rect">
+            <a:avLst/>
+          </a:prstGeom>
+          <a:solidFill>
+            <a:srgbClr val="00C896"/>
+          </a:solidFill>
+          <a:ln>
+            <a:noFill/>
           </a:ln>
           <a:effectLst/>
         </p:spPr>
@@ -8211,30 +8341,2941 @@
           </a:p>
         </p:txBody>
       </p:sp>
-      <p:pic>
-        <p:nvPicPr>
-          <p:cNvPr id="5" name="Picture 4" descr="dashboard_overview.png"/>
-          <p:cNvPicPr>
-            <a:picLocks noChangeAspect="1"/>
-          </p:cNvPicPr>
-          <p:nvPr/>
-        </p:nvPicPr>
-        <p:blipFill>
-          <a:blip r:embed="rId2"/>
-          <a:stretch>
-            <a:fillRect/>
-          </a:stretch>
-        </p:blipFill>
-        <p:spPr>
-          <a:xfrm>
-            <a:off x="640080" y="1554480"/>
-            <a:ext cx="10927080" cy="7512367"/>
-          </a:xfrm>
-          <a:prstGeom prst="rect">
-            <a:avLst/>
-          </a:prstGeom>
-        </p:spPr>
-      </p:pic>
+      <p:sp>
+        <p:nvSpPr>
+          <p:cNvPr id="4" name="frescura_titular"/>
+          <p:cNvSpPr txBox="1"/>
+          <p:nvPr/>
+        </p:nvSpPr>
+        <p:spPr>
+          <a:xfrm>
+            <a:off x="868680" y="896112"/>
+            <a:ext cx="10682935" cy="457200"/>
+          </a:xfrm>
+          <a:prstGeom prst="rect">
+            <a:avLst/>
+          </a:prstGeom>
+          <a:noFill/>
+        </p:spPr>
+        <p:txBody>
+          <a:bodyPr wrap="square" anchor="ctr" lIns="73152" rIns="73152" tIns="18288" bIns="18288">
+            <a:spAutoFit/>
+          </a:bodyPr>
+          <a:lstStyle/>
+          <a:p>
+            <a:pPr algn="l"/>
+            <a:r>
+              <a:rPr sz="1200" b="0">
+                <a:solidFill>
+                  <a:srgbClr val="9DB0C8"/>
+                </a:solidFill>
+                <a:latin typeface="Segoe UI"/>
+              </a:rPr>
+              <a:t>Última carga de cada tabla que usa el programa y si llegó tarde · revisado el 2026-09-24 20:40</a:t>
+            </a:r>
+          </a:p>
+          <a:p>
+            <a:pPr algn="l"/>
+            <a:r>
+              <a:rPr sz="1200" b="1">
+                <a:solidFill>
+                  <a:srgbClr val="B9C8DC"/>
+                </a:solidFill>
+                <a:latin typeface="Segoe UI"/>
+              </a:rPr>
+              <a:t>1 atrasada(s): Cartera scoreada · 2 sin cargar: Evaluaciones de calidad, Cartera real importada</a:t>
+            </a:r>
+          </a:p>
+        </p:txBody>
+      </p:sp>
+      <p:sp>
+        <p:nvSpPr>
+          <p:cNvPr id="5" name="frescura_kpi_total"/>
+          <p:cNvSpPr/>
+          <p:nvPr/>
+        </p:nvSpPr>
+        <p:spPr>
+          <a:xfrm>
+            <a:off x="640080" y="1371600"/>
+            <a:ext cx="2590723" cy="868680"/>
+          </a:xfrm>
+          <a:prstGeom prst="roundRect">
+            <a:avLst>
+              <a:gd name="adj" fmla="val 18000"/>
+            </a:avLst>
+          </a:prstGeom>
+          <a:solidFill>
+            <a:srgbClr val="0E1E34"/>
+          </a:solidFill>
+          <a:ln w="12700">
+            <a:solidFill>
+              <a:srgbClr val="00C896"/>
+            </a:solidFill>
+          </a:ln>
+          <a:effectLst/>
+        </p:spPr>
+        <p:style>
+          <a:lnRef idx="1">
+            <a:schemeClr val="accent1"/>
+          </a:lnRef>
+          <a:fillRef idx="3">
+            <a:schemeClr val="accent1"/>
+          </a:fillRef>
+          <a:effectRef idx="2">
+            <a:schemeClr val="accent1"/>
+          </a:effectRef>
+          <a:fontRef idx="minor">
+            <a:schemeClr val="lt1"/>
+          </a:fontRef>
+        </p:style>
+        <p:txBody>
+          <a:bodyPr rtlCol="0" anchor="ctr"/>
+          <a:lstStyle/>
+          <a:p>
+            <a:pPr algn="ctr"/>
+          </a:p>
+        </p:txBody>
+      </p:sp>
+      <p:sp>
+        <p:nvSpPr>
+          <p:cNvPr id="6" name="Rounded Rectangle 5"/>
+          <p:cNvSpPr/>
+          <p:nvPr/>
+        </p:nvSpPr>
+        <p:spPr>
+          <a:xfrm>
+            <a:off x="731519" y="1554480"/>
+            <a:ext cx="64008" cy="502919"/>
+          </a:xfrm>
+          <a:prstGeom prst="roundRect">
+            <a:avLst>
+              <a:gd name="adj" fmla="val 18000"/>
+            </a:avLst>
+          </a:prstGeom>
+          <a:solidFill>
+            <a:srgbClr val="00C896"/>
+          </a:solidFill>
+          <a:ln>
+            <a:noFill/>
+          </a:ln>
+          <a:effectLst/>
+        </p:spPr>
+        <p:style>
+          <a:lnRef idx="1">
+            <a:schemeClr val="accent1"/>
+          </a:lnRef>
+          <a:fillRef idx="3">
+            <a:schemeClr val="accent1"/>
+          </a:fillRef>
+          <a:effectRef idx="2">
+            <a:schemeClr val="accent1"/>
+          </a:effectRef>
+          <a:fontRef idx="minor">
+            <a:schemeClr val="lt1"/>
+          </a:fontRef>
+        </p:style>
+        <p:txBody>
+          <a:bodyPr rtlCol="0" anchor="ctr"/>
+          <a:lstStyle/>
+          <a:p>
+            <a:pPr algn="ctr"/>
+          </a:p>
+        </p:txBody>
+      </p:sp>
+      <p:sp>
+        <p:nvSpPr>
+          <p:cNvPr id="7" name="TextBox 6"/>
+          <p:cNvSpPr txBox="1"/>
+          <p:nvPr/>
+        </p:nvSpPr>
+        <p:spPr>
+          <a:xfrm>
+            <a:off x="841247" y="1426464"/>
+            <a:ext cx="2298115" cy="475488"/>
+          </a:xfrm>
+          <a:prstGeom prst="rect">
+            <a:avLst/>
+          </a:prstGeom>
+          <a:noFill/>
+        </p:spPr>
+        <p:txBody>
+          <a:bodyPr wrap="square" anchor="ctr" lIns="73152" rIns="73152" tIns="18288" bIns="18288">
+            <a:spAutoFit/>
+          </a:bodyPr>
+          <a:lstStyle/>
+          <a:p>
+            <a:pPr algn="l"/>
+            <a:r>
+              <a:rPr sz="2600" b="1">
+                <a:solidFill>
+                  <a:srgbClr val="00C896"/>
+                </a:solidFill>
+                <a:latin typeface="Segoe UI"/>
+              </a:rPr>
+              <a:t>5</a:t>
+            </a:r>
+          </a:p>
+        </p:txBody>
+      </p:sp>
+      <p:sp>
+        <p:nvSpPr>
+          <p:cNvPr id="8" name="TextBox 7"/>
+          <p:cNvSpPr txBox="1"/>
+          <p:nvPr/>
+        </p:nvSpPr>
+        <p:spPr>
+          <a:xfrm>
+            <a:off x="841247" y="1883664"/>
+            <a:ext cx="2298115" cy="292608"/>
+          </a:xfrm>
+          <a:prstGeom prst="rect">
+            <a:avLst/>
+          </a:prstGeom>
+          <a:noFill/>
+        </p:spPr>
+        <p:txBody>
+          <a:bodyPr wrap="square" anchor="ctr" lIns="73152" rIns="73152" tIns="18288" bIns="18288">
+            <a:spAutoFit/>
+          </a:bodyPr>
+          <a:lstStyle/>
+          <a:p>
+            <a:pPr algn="l"/>
+            <a:r>
+              <a:rPr sz="1200" b="0">
+                <a:solidFill>
+                  <a:srgbClr val="B9C8DC"/>
+                </a:solidFill>
+                <a:latin typeface="Segoe UI"/>
+              </a:rPr>
+              <a:t>Tablas controladas</a:t>
+            </a:r>
+          </a:p>
+        </p:txBody>
+      </p:sp>
+      <p:sp>
+        <p:nvSpPr>
+          <p:cNvPr id="9" name="frescura_kpi_al_dia"/>
+          <p:cNvSpPr/>
+          <p:nvPr/>
+        </p:nvSpPr>
+        <p:spPr>
+          <a:xfrm>
+            <a:off x="3413683" y="1371600"/>
+            <a:ext cx="2590723" cy="868680"/>
+          </a:xfrm>
+          <a:prstGeom prst="roundRect">
+            <a:avLst>
+              <a:gd name="adj" fmla="val 18000"/>
+            </a:avLst>
+          </a:prstGeom>
+          <a:solidFill>
+            <a:srgbClr val="0E1E34"/>
+          </a:solidFill>
+          <a:ln w="12700">
+            <a:solidFill>
+              <a:srgbClr val="00C896"/>
+            </a:solidFill>
+          </a:ln>
+          <a:effectLst/>
+        </p:spPr>
+        <p:style>
+          <a:lnRef idx="1">
+            <a:schemeClr val="accent1"/>
+          </a:lnRef>
+          <a:fillRef idx="3">
+            <a:schemeClr val="accent1"/>
+          </a:fillRef>
+          <a:effectRef idx="2">
+            <a:schemeClr val="accent1"/>
+          </a:effectRef>
+          <a:fontRef idx="minor">
+            <a:schemeClr val="lt1"/>
+          </a:fontRef>
+        </p:style>
+        <p:txBody>
+          <a:bodyPr rtlCol="0" anchor="ctr"/>
+          <a:lstStyle/>
+          <a:p>
+            <a:pPr algn="ctr"/>
+          </a:p>
+        </p:txBody>
+      </p:sp>
+      <p:sp>
+        <p:nvSpPr>
+          <p:cNvPr id="10" name="Rounded Rectangle 9"/>
+          <p:cNvSpPr/>
+          <p:nvPr/>
+        </p:nvSpPr>
+        <p:spPr>
+          <a:xfrm>
+            <a:off x="3505123" y="1554480"/>
+            <a:ext cx="64008" cy="502919"/>
+          </a:xfrm>
+          <a:prstGeom prst="roundRect">
+            <a:avLst>
+              <a:gd name="adj" fmla="val 18000"/>
+            </a:avLst>
+          </a:prstGeom>
+          <a:solidFill>
+            <a:srgbClr val="00C896"/>
+          </a:solidFill>
+          <a:ln>
+            <a:noFill/>
+          </a:ln>
+          <a:effectLst/>
+        </p:spPr>
+        <p:style>
+          <a:lnRef idx="1">
+            <a:schemeClr val="accent1"/>
+          </a:lnRef>
+          <a:fillRef idx="3">
+            <a:schemeClr val="accent1"/>
+          </a:fillRef>
+          <a:effectRef idx="2">
+            <a:schemeClr val="accent1"/>
+          </a:effectRef>
+          <a:fontRef idx="minor">
+            <a:schemeClr val="lt1"/>
+          </a:fontRef>
+        </p:style>
+        <p:txBody>
+          <a:bodyPr rtlCol="0" anchor="ctr"/>
+          <a:lstStyle/>
+          <a:p>
+            <a:pPr algn="ctr"/>
+          </a:p>
+        </p:txBody>
+      </p:sp>
+      <p:sp>
+        <p:nvSpPr>
+          <p:cNvPr id="11" name="TextBox 10"/>
+          <p:cNvSpPr txBox="1"/>
+          <p:nvPr/>
+        </p:nvSpPr>
+        <p:spPr>
+          <a:xfrm>
+            <a:off x="3614851" y="1426464"/>
+            <a:ext cx="2298115" cy="475488"/>
+          </a:xfrm>
+          <a:prstGeom prst="rect">
+            <a:avLst/>
+          </a:prstGeom>
+          <a:noFill/>
+        </p:spPr>
+        <p:txBody>
+          <a:bodyPr wrap="square" anchor="ctr" lIns="73152" rIns="73152" tIns="18288" bIns="18288">
+            <a:spAutoFit/>
+          </a:bodyPr>
+          <a:lstStyle/>
+          <a:p>
+            <a:pPr algn="l"/>
+            <a:r>
+              <a:rPr sz="2600" b="1">
+                <a:solidFill>
+                  <a:srgbClr val="00C896"/>
+                </a:solidFill>
+                <a:latin typeface="Segoe UI"/>
+              </a:rPr>
+              <a:t>2</a:t>
+            </a:r>
+          </a:p>
+        </p:txBody>
+      </p:sp>
+      <p:sp>
+        <p:nvSpPr>
+          <p:cNvPr id="12" name="TextBox 11"/>
+          <p:cNvSpPr txBox="1"/>
+          <p:nvPr/>
+        </p:nvSpPr>
+        <p:spPr>
+          <a:xfrm>
+            <a:off x="3614851" y="1883664"/>
+            <a:ext cx="2298115" cy="292608"/>
+          </a:xfrm>
+          <a:prstGeom prst="rect">
+            <a:avLst/>
+          </a:prstGeom>
+          <a:noFill/>
+        </p:spPr>
+        <p:txBody>
+          <a:bodyPr wrap="square" anchor="ctr" lIns="73152" rIns="73152" tIns="18288" bIns="18288">
+            <a:spAutoFit/>
+          </a:bodyPr>
+          <a:lstStyle/>
+          <a:p>
+            <a:pPr algn="l"/>
+            <a:r>
+              <a:rPr sz="1200" b="0">
+                <a:solidFill>
+                  <a:srgbClr val="B9C8DC"/>
+                </a:solidFill>
+                <a:latin typeface="Segoe UI"/>
+              </a:rPr>
+              <a:t>Al día</a:t>
+            </a:r>
+          </a:p>
+        </p:txBody>
+      </p:sp>
+      <p:sp>
+        <p:nvSpPr>
+          <p:cNvPr id="13" name="frescura_kpi_atrasada"/>
+          <p:cNvSpPr/>
+          <p:nvPr/>
+        </p:nvSpPr>
+        <p:spPr>
+          <a:xfrm>
+            <a:off x="6187287" y="1371600"/>
+            <a:ext cx="2590723" cy="868680"/>
+          </a:xfrm>
+          <a:prstGeom prst="roundRect">
+            <a:avLst>
+              <a:gd name="adj" fmla="val 18000"/>
+            </a:avLst>
+          </a:prstGeom>
+          <a:solidFill>
+            <a:srgbClr val="0E1E34"/>
+          </a:solidFill>
+          <a:ln w="12700">
+            <a:solidFill>
+              <a:srgbClr val="F2B441"/>
+            </a:solidFill>
+          </a:ln>
+          <a:effectLst/>
+        </p:spPr>
+        <p:style>
+          <a:lnRef idx="1">
+            <a:schemeClr val="accent1"/>
+          </a:lnRef>
+          <a:fillRef idx="3">
+            <a:schemeClr val="accent1"/>
+          </a:fillRef>
+          <a:effectRef idx="2">
+            <a:schemeClr val="accent1"/>
+          </a:effectRef>
+          <a:fontRef idx="minor">
+            <a:schemeClr val="lt1"/>
+          </a:fontRef>
+        </p:style>
+        <p:txBody>
+          <a:bodyPr rtlCol="0" anchor="ctr"/>
+          <a:lstStyle/>
+          <a:p>
+            <a:pPr algn="ctr"/>
+          </a:p>
+        </p:txBody>
+      </p:sp>
+      <p:sp>
+        <p:nvSpPr>
+          <p:cNvPr id="14" name="Rounded Rectangle 13"/>
+          <p:cNvSpPr/>
+          <p:nvPr/>
+        </p:nvSpPr>
+        <p:spPr>
+          <a:xfrm>
+            <a:off x="6278727" y="1554480"/>
+            <a:ext cx="64008" cy="502919"/>
+          </a:xfrm>
+          <a:prstGeom prst="roundRect">
+            <a:avLst>
+              <a:gd name="adj" fmla="val 18000"/>
+            </a:avLst>
+          </a:prstGeom>
+          <a:solidFill>
+            <a:srgbClr val="F2B441"/>
+          </a:solidFill>
+          <a:ln>
+            <a:noFill/>
+          </a:ln>
+          <a:effectLst/>
+        </p:spPr>
+        <p:style>
+          <a:lnRef idx="1">
+            <a:schemeClr val="accent1"/>
+          </a:lnRef>
+          <a:fillRef idx="3">
+            <a:schemeClr val="accent1"/>
+          </a:fillRef>
+          <a:effectRef idx="2">
+            <a:schemeClr val="accent1"/>
+          </a:effectRef>
+          <a:fontRef idx="minor">
+            <a:schemeClr val="lt1"/>
+          </a:fontRef>
+        </p:style>
+        <p:txBody>
+          <a:bodyPr rtlCol="0" anchor="ctr"/>
+          <a:lstStyle/>
+          <a:p>
+            <a:pPr algn="ctr"/>
+          </a:p>
+        </p:txBody>
+      </p:sp>
+      <p:sp>
+        <p:nvSpPr>
+          <p:cNvPr id="15" name="TextBox 14"/>
+          <p:cNvSpPr txBox="1"/>
+          <p:nvPr/>
+        </p:nvSpPr>
+        <p:spPr>
+          <a:xfrm>
+            <a:off x="6388455" y="1426464"/>
+            <a:ext cx="2298115" cy="475488"/>
+          </a:xfrm>
+          <a:prstGeom prst="rect">
+            <a:avLst/>
+          </a:prstGeom>
+          <a:noFill/>
+        </p:spPr>
+        <p:txBody>
+          <a:bodyPr wrap="square" anchor="ctr" lIns="73152" rIns="73152" tIns="18288" bIns="18288">
+            <a:spAutoFit/>
+          </a:bodyPr>
+          <a:lstStyle/>
+          <a:p>
+            <a:pPr algn="l"/>
+            <a:r>
+              <a:rPr sz="2600" b="1">
+                <a:solidFill>
+                  <a:srgbClr val="F2B441"/>
+                </a:solidFill>
+                <a:latin typeface="Segoe UI"/>
+              </a:rPr>
+              <a:t>1</a:t>
+            </a:r>
+          </a:p>
+        </p:txBody>
+      </p:sp>
+      <p:sp>
+        <p:nvSpPr>
+          <p:cNvPr id="16" name="TextBox 15"/>
+          <p:cNvSpPr txBox="1"/>
+          <p:nvPr/>
+        </p:nvSpPr>
+        <p:spPr>
+          <a:xfrm>
+            <a:off x="6388455" y="1883664"/>
+            <a:ext cx="2298115" cy="292608"/>
+          </a:xfrm>
+          <a:prstGeom prst="rect">
+            <a:avLst/>
+          </a:prstGeom>
+          <a:noFill/>
+        </p:spPr>
+        <p:txBody>
+          <a:bodyPr wrap="square" anchor="ctr" lIns="73152" rIns="73152" tIns="18288" bIns="18288">
+            <a:spAutoFit/>
+          </a:bodyPr>
+          <a:lstStyle/>
+          <a:p>
+            <a:pPr algn="l"/>
+            <a:r>
+              <a:rPr sz="1200" b="0">
+                <a:solidFill>
+                  <a:srgbClr val="B9C8DC"/>
+                </a:solidFill>
+                <a:latin typeface="Segoe UI"/>
+              </a:rPr>
+              <a:t>Atrasadas</a:t>
+            </a:r>
+          </a:p>
+        </p:txBody>
+      </p:sp>
+      <p:sp>
+        <p:nvSpPr>
+          <p:cNvPr id="17" name="frescura_kpi_sin_datos"/>
+          <p:cNvSpPr/>
+          <p:nvPr/>
+        </p:nvSpPr>
+        <p:spPr>
+          <a:xfrm>
+            <a:off x="8960891" y="1371600"/>
+            <a:ext cx="2590723" cy="868680"/>
+          </a:xfrm>
+          <a:prstGeom prst="roundRect">
+            <a:avLst>
+              <a:gd name="adj" fmla="val 18000"/>
+            </a:avLst>
+          </a:prstGeom>
+          <a:solidFill>
+            <a:srgbClr val="0E1E34"/>
+          </a:solidFill>
+          <a:ln w="12700">
+            <a:solidFill>
+              <a:srgbClr val="FF7675"/>
+            </a:solidFill>
+          </a:ln>
+          <a:effectLst/>
+        </p:spPr>
+        <p:style>
+          <a:lnRef idx="1">
+            <a:schemeClr val="accent1"/>
+          </a:lnRef>
+          <a:fillRef idx="3">
+            <a:schemeClr val="accent1"/>
+          </a:fillRef>
+          <a:effectRef idx="2">
+            <a:schemeClr val="accent1"/>
+          </a:effectRef>
+          <a:fontRef idx="minor">
+            <a:schemeClr val="lt1"/>
+          </a:fontRef>
+        </p:style>
+        <p:txBody>
+          <a:bodyPr rtlCol="0" anchor="ctr"/>
+          <a:lstStyle/>
+          <a:p>
+            <a:pPr algn="ctr"/>
+          </a:p>
+        </p:txBody>
+      </p:sp>
+      <p:sp>
+        <p:nvSpPr>
+          <p:cNvPr id="18" name="Rounded Rectangle 17"/>
+          <p:cNvSpPr/>
+          <p:nvPr/>
+        </p:nvSpPr>
+        <p:spPr>
+          <a:xfrm>
+            <a:off x="9052331" y="1554480"/>
+            <a:ext cx="64008" cy="502919"/>
+          </a:xfrm>
+          <a:prstGeom prst="roundRect">
+            <a:avLst>
+              <a:gd name="adj" fmla="val 18000"/>
+            </a:avLst>
+          </a:prstGeom>
+          <a:solidFill>
+            <a:srgbClr val="FF7675"/>
+          </a:solidFill>
+          <a:ln>
+            <a:noFill/>
+          </a:ln>
+          <a:effectLst/>
+        </p:spPr>
+        <p:style>
+          <a:lnRef idx="1">
+            <a:schemeClr val="accent1"/>
+          </a:lnRef>
+          <a:fillRef idx="3">
+            <a:schemeClr val="accent1"/>
+          </a:fillRef>
+          <a:effectRef idx="2">
+            <a:schemeClr val="accent1"/>
+          </a:effectRef>
+          <a:fontRef idx="minor">
+            <a:schemeClr val="lt1"/>
+          </a:fontRef>
+        </p:style>
+        <p:txBody>
+          <a:bodyPr rtlCol="0" anchor="ctr"/>
+          <a:lstStyle/>
+          <a:p>
+            <a:pPr algn="ctr"/>
+          </a:p>
+        </p:txBody>
+      </p:sp>
+      <p:sp>
+        <p:nvSpPr>
+          <p:cNvPr id="19" name="TextBox 18"/>
+          <p:cNvSpPr txBox="1"/>
+          <p:nvPr/>
+        </p:nvSpPr>
+        <p:spPr>
+          <a:xfrm>
+            <a:off x="9162059" y="1426464"/>
+            <a:ext cx="2298115" cy="475488"/>
+          </a:xfrm>
+          <a:prstGeom prst="rect">
+            <a:avLst/>
+          </a:prstGeom>
+          <a:noFill/>
+        </p:spPr>
+        <p:txBody>
+          <a:bodyPr wrap="square" anchor="ctr" lIns="73152" rIns="73152" tIns="18288" bIns="18288">
+            <a:spAutoFit/>
+          </a:bodyPr>
+          <a:lstStyle/>
+          <a:p>
+            <a:pPr algn="l"/>
+            <a:r>
+              <a:rPr sz="2600" b="1">
+                <a:solidFill>
+                  <a:srgbClr val="FF7675"/>
+                </a:solidFill>
+                <a:latin typeface="Segoe UI"/>
+              </a:rPr>
+              <a:t>2</a:t>
+            </a:r>
+          </a:p>
+        </p:txBody>
+      </p:sp>
+      <p:sp>
+        <p:nvSpPr>
+          <p:cNvPr id="20" name="TextBox 19"/>
+          <p:cNvSpPr txBox="1"/>
+          <p:nvPr/>
+        </p:nvSpPr>
+        <p:spPr>
+          <a:xfrm>
+            <a:off x="9162059" y="1883664"/>
+            <a:ext cx="2298115" cy="292608"/>
+          </a:xfrm>
+          <a:prstGeom prst="rect">
+            <a:avLst/>
+          </a:prstGeom>
+          <a:noFill/>
+        </p:spPr>
+        <p:txBody>
+          <a:bodyPr wrap="square" anchor="ctr" lIns="73152" rIns="73152" tIns="18288" bIns="18288">
+            <a:spAutoFit/>
+          </a:bodyPr>
+          <a:lstStyle/>
+          <a:p>
+            <a:pPr algn="l"/>
+            <a:r>
+              <a:rPr sz="1200" b="0">
+                <a:solidFill>
+                  <a:srgbClr val="B9C8DC"/>
+                </a:solidFill>
+                <a:latin typeface="Segoe UI"/>
+              </a:rPr>
+              <a:t>Sin cargar</a:t>
+            </a:r>
+          </a:p>
+        </p:txBody>
+      </p:sp>
+      <p:sp>
+        <p:nvSpPr>
+          <p:cNvPr id="21" name="Rectangle 20"/>
+          <p:cNvSpPr/>
+          <p:nvPr/>
+        </p:nvSpPr>
+        <p:spPr>
+          <a:xfrm>
+            <a:off x="640080" y="2395728"/>
+            <a:ext cx="10911535" cy="329184"/>
+          </a:xfrm>
+          <a:prstGeom prst="rect">
+            <a:avLst/>
+          </a:prstGeom>
+          <a:solidFill>
+            <a:srgbClr val="0C2137"/>
+          </a:solidFill>
+          <a:ln>
+            <a:noFill/>
+          </a:ln>
+          <a:effectLst/>
+        </p:spPr>
+        <p:style>
+          <a:lnRef idx="1">
+            <a:schemeClr val="accent1"/>
+          </a:lnRef>
+          <a:fillRef idx="3">
+            <a:schemeClr val="accent1"/>
+          </a:fillRef>
+          <a:effectRef idx="2">
+            <a:schemeClr val="accent1"/>
+          </a:effectRef>
+          <a:fontRef idx="minor">
+            <a:schemeClr val="lt1"/>
+          </a:fontRef>
+        </p:style>
+        <p:txBody>
+          <a:bodyPr rtlCol="0" anchor="ctr"/>
+          <a:lstStyle/>
+          <a:p>
+            <a:pPr algn="ctr"/>
+          </a:p>
+        </p:txBody>
+      </p:sp>
+      <p:sp>
+        <p:nvSpPr>
+          <p:cNvPr id="22" name="TextBox 21"/>
+          <p:cNvSpPr txBox="1"/>
+          <p:nvPr/>
+        </p:nvSpPr>
+        <p:spPr>
+          <a:xfrm>
+            <a:off x="768096" y="2395728"/>
+            <a:ext cx="3472790" cy="329184"/>
+          </a:xfrm>
+          <a:prstGeom prst="rect">
+            <a:avLst/>
+          </a:prstGeom>
+          <a:noFill/>
+        </p:spPr>
+        <p:txBody>
+          <a:bodyPr wrap="square" anchor="ctr" lIns="73152" rIns="73152" tIns="18288" bIns="18288">
+            <a:spAutoFit/>
+          </a:bodyPr>
+          <a:lstStyle/>
+          <a:p>
+            <a:pPr algn="l"/>
+            <a:r>
+              <a:rPr sz="950" b="1">
+                <a:solidFill>
+                  <a:srgbClr val="00C896"/>
+                </a:solidFill>
+                <a:latin typeface="Segoe UI"/>
+              </a:rPr>
+              <a:t>TABLA / DATASET</a:t>
+            </a:r>
+          </a:p>
+        </p:txBody>
+      </p:sp>
+      <p:sp>
+        <p:nvSpPr>
+          <p:cNvPr id="23" name="TextBox 22"/>
+          <p:cNvSpPr txBox="1"/>
+          <p:nvPr/>
+        </p:nvSpPr>
+        <p:spPr>
+          <a:xfrm>
+            <a:off x="4240886" y="2395728"/>
+            <a:ext cx="1800403" cy="329184"/>
+          </a:xfrm>
+          <a:prstGeom prst="rect">
+            <a:avLst/>
+          </a:prstGeom>
+          <a:noFill/>
+        </p:spPr>
+        <p:txBody>
+          <a:bodyPr wrap="square" anchor="ctr" lIns="73152" rIns="73152" tIns="18288" bIns="18288">
+            <a:spAutoFit/>
+          </a:bodyPr>
+          <a:lstStyle/>
+          <a:p>
+            <a:pPr algn="l"/>
+            <a:r>
+              <a:rPr sz="950" b="1">
+                <a:solidFill>
+                  <a:srgbClr val="00C896"/>
+                </a:solidFill>
+                <a:latin typeface="Segoe UI"/>
+              </a:rPr>
+              <a:t>ÚLTIMA CARGA</a:t>
+            </a:r>
+          </a:p>
+        </p:txBody>
+      </p:sp>
+      <p:sp>
+        <p:nvSpPr>
+          <p:cNvPr id="24" name="TextBox 23"/>
+          <p:cNvSpPr txBox="1"/>
+          <p:nvPr/>
+        </p:nvSpPr>
+        <p:spPr>
+          <a:xfrm>
+            <a:off x="6041289" y="2395728"/>
+            <a:ext cx="1418499" cy="329184"/>
+          </a:xfrm>
+          <a:prstGeom prst="rect">
+            <a:avLst/>
+          </a:prstGeom>
+          <a:noFill/>
+        </p:spPr>
+        <p:txBody>
+          <a:bodyPr wrap="square" anchor="ctr" lIns="73152" rIns="73152" tIns="18288" bIns="18288">
+            <a:spAutoFit/>
+          </a:bodyPr>
+          <a:lstStyle/>
+          <a:p>
+            <a:pPr algn="l"/>
+            <a:r>
+              <a:rPr sz="950" b="1">
+                <a:solidFill>
+                  <a:srgbClr val="00C896"/>
+                </a:solidFill>
+                <a:latin typeface="Segoe UI"/>
+              </a:rPr>
+              <a:t>FECHA DEL DATO</a:t>
+            </a:r>
+          </a:p>
+        </p:txBody>
+      </p:sp>
+      <p:sp>
+        <p:nvSpPr>
+          <p:cNvPr id="25" name="TextBox 24"/>
+          <p:cNvSpPr txBox="1"/>
+          <p:nvPr/>
+        </p:nvSpPr>
+        <p:spPr>
+          <a:xfrm>
+            <a:off x="7459789" y="2395728"/>
+            <a:ext cx="1091153" cy="329184"/>
+          </a:xfrm>
+          <a:prstGeom prst="rect">
+            <a:avLst/>
+          </a:prstGeom>
+          <a:noFill/>
+        </p:spPr>
+        <p:txBody>
+          <a:bodyPr wrap="square" anchor="ctr" lIns="73152" rIns="73152" tIns="18288" bIns="18288">
+            <a:spAutoFit/>
+          </a:bodyPr>
+          <a:lstStyle/>
+          <a:p>
+            <a:pPr algn="r"/>
+            <a:r>
+              <a:rPr sz="950" b="1">
+                <a:solidFill>
+                  <a:srgbClr val="00C896"/>
+                </a:solidFill>
+                <a:latin typeface="Segoe UI"/>
+              </a:rPr>
+              <a:t>FILAS</a:t>
+            </a:r>
+          </a:p>
+        </p:txBody>
+      </p:sp>
+      <p:sp>
+        <p:nvSpPr>
+          <p:cNvPr id="26" name="TextBox 25"/>
+          <p:cNvSpPr txBox="1"/>
+          <p:nvPr/>
+        </p:nvSpPr>
+        <p:spPr>
+          <a:xfrm>
+            <a:off x="8550942" y="2395728"/>
+            <a:ext cx="1745845" cy="329184"/>
+          </a:xfrm>
+          <a:prstGeom prst="rect">
+            <a:avLst/>
+          </a:prstGeom>
+          <a:noFill/>
+        </p:spPr>
+        <p:txBody>
+          <a:bodyPr wrap="square" anchor="ctr" lIns="73152" rIns="73152" tIns="18288" bIns="18288">
+            <a:spAutoFit/>
+          </a:bodyPr>
+          <a:lstStyle/>
+          <a:p>
+            <a:pPr algn="l"/>
+            <a:r>
+              <a:rPr sz="950" b="1">
+                <a:solidFill>
+                  <a:srgbClr val="00C896"/>
+                </a:solidFill>
+                <a:latin typeface="Segoe UI"/>
+              </a:rPr>
+              <a:t>FRECUENCIA ESPERADA</a:t>
+            </a:r>
+          </a:p>
+        </p:txBody>
+      </p:sp>
+      <p:sp>
+        <p:nvSpPr>
+          <p:cNvPr id="27" name="TextBox 26"/>
+          <p:cNvSpPr txBox="1"/>
+          <p:nvPr/>
+        </p:nvSpPr>
+        <p:spPr>
+          <a:xfrm>
+            <a:off x="10296788" y="2395728"/>
+            <a:ext cx="1254826" cy="329184"/>
+          </a:xfrm>
+          <a:prstGeom prst="rect">
+            <a:avLst/>
+          </a:prstGeom>
+          <a:noFill/>
+        </p:spPr>
+        <p:txBody>
+          <a:bodyPr wrap="square" anchor="ctr" lIns="73152" rIns="73152" tIns="18288" bIns="18288">
+            <a:spAutoFit/>
+          </a:bodyPr>
+          <a:lstStyle/>
+          <a:p>
+            <a:pPr algn="ctr"/>
+            <a:r>
+              <a:rPr sz="950" b="1">
+                <a:solidFill>
+                  <a:srgbClr val="00C896"/>
+                </a:solidFill>
+                <a:latin typeface="Segoe UI"/>
+              </a:rPr>
+              <a:t>SEMÁFORO</a:t>
+            </a:r>
+          </a:p>
+        </p:txBody>
+      </p:sp>
+      <p:sp>
+        <p:nvSpPr>
+          <p:cNvPr id="28" name="frescura_fila_scored"/>
+          <p:cNvSpPr/>
+          <p:nvPr/>
+        </p:nvSpPr>
+        <p:spPr>
+          <a:xfrm>
+            <a:off x="640080" y="2779776"/>
+            <a:ext cx="10911535" cy="603504"/>
+          </a:xfrm>
+          <a:prstGeom prst="roundRect">
+            <a:avLst>
+              <a:gd name="adj" fmla="val 18000"/>
+            </a:avLst>
+          </a:prstGeom>
+          <a:solidFill>
+            <a:srgbClr val="0E1E34"/>
+          </a:solidFill>
+          <a:ln>
+            <a:noFill/>
+          </a:ln>
+          <a:effectLst/>
+        </p:spPr>
+        <p:style>
+          <a:lnRef idx="1">
+            <a:schemeClr val="accent1"/>
+          </a:lnRef>
+          <a:fillRef idx="3">
+            <a:schemeClr val="accent1"/>
+          </a:fillRef>
+          <a:effectRef idx="2">
+            <a:schemeClr val="accent1"/>
+          </a:effectRef>
+          <a:fontRef idx="minor">
+            <a:schemeClr val="lt1"/>
+          </a:fontRef>
+        </p:style>
+        <p:txBody>
+          <a:bodyPr rtlCol="0" anchor="ctr"/>
+          <a:lstStyle/>
+          <a:p>
+            <a:pPr algn="ctr"/>
+          </a:p>
+        </p:txBody>
+      </p:sp>
+      <p:sp>
+        <p:nvSpPr>
+          <p:cNvPr id="29" name="Rounded Rectangle 28"/>
+          <p:cNvSpPr/>
+          <p:nvPr/>
+        </p:nvSpPr>
+        <p:spPr>
+          <a:xfrm>
+            <a:off x="694944" y="2871216"/>
+            <a:ext cx="64008" cy="420624"/>
+          </a:xfrm>
+          <a:prstGeom prst="roundRect">
+            <a:avLst>
+              <a:gd name="adj" fmla="val 18000"/>
+            </a:avLst>
+          </a:prstGeom>
+          <a:solidFill>
+            <a:srgbClr val="F2B441"/>
+          </a:solidFill>
+          <a:ln>
+            <a:noFill/>
+          </a:ln>
+          <a:effectLst/>
+        </p:spPr>
+        <p:style>
+          <a:lnRef idx="1">
+            <a:schemeClr val="accent1"/>
+          </a:lnRef>
+          <a:fillRef idx="3">
+            <a:schemeClr val="accent1"/>
+          </a:fillRef>
+          <a:effectRef idx="2">
+            <a:schemeClr val="accent1"/>
+          </a:effectRef>
+          <a:fontRef idx="minor">
+            <a:schemeClr val="lt1"/>
+          </a:fontRef>
+        </p:style>
+        <p:txBody>
+          <a:bodyPr rtlCol="0" anchor="ctr"/>
+          <a:lstStyle/>
+          <a:p>
+            <a:pPr algn="ctr"/>
+          </a:p>
+        </p:txBody>
+      </p:sp>
+      <p:sp>
+        <p:nvSpPr>
+          <p:cNvPr id="30" name="frescura_celda_scored_0"/>
+          <p:cNvSpPr txBox="1"/>
+          <p:nvPr/>
+        </p:nvSpPr>
+        <p:spPr>
+          <a:xfrm>
+            <a:off x="768096" y="2779776"/>
+            <a:ext cx="3472790" cy="603504"/>
+          </a:xfrm>
+          <a:prstGeom prst="rect">
+            <a:avLst/>
+          </a:prstGeom>
+          <a:noFill/>
+        </p:spPr>
+        <p:txBody>
+          <a:bodyPr wrap="square" anchor="ctr" lIns="73152" rIns="73152" tIns="18288" bIns="18288">
+            <a:spAutoFit/>
+          </a:bodyPr>
+          <a:lstStyle/>
+          <a:p>
+            <a:pPr algn="l"/>
+            <a:r>
+              <a:rPr sz="1250" b="1">
+                <a:solidFill>
+                  <a:srgbClr val="EAF1FB"/>
+                </a:solidFill>
+                <a:latin typeface="Segoe UI"/>
+              </a:rPr>
+              <a:t>Cartera scoreada</a:t>
+            </a:r>
+          </a:p>
+          <a:p>
+            <a:pPr algn="l"/>
+            <a:r>
+              <a:rPr sz="850" b="0">
+                <a:solidFill>
+                  <a:srgbClr val="9DB0C8"/>
+                </a:solidFill>
+                <a:latin typeface="Segoe UI"/>
+              </a:rPr>
+              <a:t>Se esperaba una carga diaria y la última fue hace 19 días (18 días más de lo previsto).</a:t>
+            </a:r>
+          </a:p>
+        </p:txBody>
+      </p:sp>
+      <p:sp>
+        <p:nvSpPr>
+          <p:cNvPr id="31" name="frescura_celda_scored_1"/>
+          <p:cNvSpPr txBox="1"/>
+          <p:nvPr/>
+        </p:nvSpPr>
+        <p:spPr>
+          <a:xfrm>
+            <a:off x="4240886" y="2779776"/>
+            <a:ext cx="1800403" cy="603504"/>
+          </a:xfrm>
+          <a:prstGeom prst="rect">
+            <a:avLst/>
+          </a:prstGeom>
+          <a:noFill/>
+        </p:spPr>
+        <p:txBody>
+          <a:bodyPr wrap="square" anchor="ctr" lIns="73152" rIns="73152" tIns="18288" bIns="18288">
+            <a:spAutoFit/>
+          </a:bodyPr>
+          <a:lstStyle/>
+          <a:p>
+            <a:pPr algn="l"/>
+            <a:r>
+              <a:rPr sz="1200" b="0">
+                <a:solidFill>
+                  <a:srgbClr val="EAF1FB"/>
+                </a:solidFill>
+                <a:latin typeface="Segoe UI"/>
+              </a:rPr>
+              <a:t>2026-09-05 12:43</a:t>
+            </a:r>
+          </a:p>
+          <a:p>
+            <a:pPr algn="l"/>
+            <a:r>
+              <a:rPr sz="900" b="0">
+                <a:solidFill>
+                  <a:srgbClr val="9DB0C8"/>
+                </a:solidFill>
+                <a:latin typeface="Segoe UI"/>
+              </a:rPr>
+              <a:t>sábado</a:t>
+            </a:r>
+          </a:p>
+        </p:txBody>
+      </p:sp>
+      <p:sp>
+        <p:nvSpPr>
+          <p:cNvPr id="32" name="frescura_celda_scored_2"/>
+          <p:cNvSpPr txBox="1"/>
+          <p:nvPr/>
+        </p:nvSpPr>
+        <p:spPr>
+          <a:xfrm>
+            <a:off x="6041289" y="2779776"/>
+            <a:ext cx="1418499" cy="603504"/>
+          </a:xfrm>
+          <a:prstGeom prst="rect">
+            <a:avLst/>
+          </a:prstGeom>
+          <a:noFill/>
+        </p:spPr>
+        <p:txBody>
+          <a:bodyPr wrap="square" anchor="ctr" lIns="73152" rIns="73152" tIns="18288" bIns="18288">
+            <a:spAutoFit/>
+          </a:bodyPr>
+          <a:lstStyle/>
+          <a:p>
+            <a:pPr algn="l"/>
+            <a:r>
+              <a:rPr sz="1200" b="0">
+                <a:solidFill>
+                  <a:srgbClr val="EAF1FB"/>
+                </a:solidFill>
+                <a:latin typeface="Segoe UI"/>
+              </a:rPr>
+              <a:t>—</a:t>
+            </a:r>
+          </a:p>
+        </p:txBody>
+      </p:sp>
+      <p:sp>
+        <p:nvSpPr>
+          <p:cNvPr id="33" name="frescura_celda_scored_3"/>
+          <p:cNvSpPr txBox="1"/>
+          <p:nvPr/>
+        </p:nvSpPr>
+        <p:spPr>
+          <a:xfrm>
+            <a:off x="7459789" y="2779776"/>
+            <a:ext cx="1091153" cy="603504"/>
+          </a:xfrm>
+          <a:prstGeom prst="rect">
+            <a:avLst/>
+          </a:prstGeom>
+          <a:noFill/>
+        </p:spPr>
+        <p:txBody>
+          <a:bodyPr wrap="square" anchor="ctr" lIns="73152" rIns="73152" tIns="18288" bIns="18288">
+            <a:spAutoFit/>
+          </a:bodyPr>
+          <a:lstStyle/>
+          <a:p>
+            <a:pPr algn="r"/>
+            <a:r>
+              <a:rPr sz="1200" b="0">
+                <a:solidFill>
+                  <a:srgbClr val="EAF1FB"/>
+                </a:solidFill>
+                <a:latin typeface="Segoe UI"/>
+              </a:rPr>
+              <a:t>12.000</a:t>
+            </a:r>
+          </a:p>
+        </p:txBody>
+      </p:sp>
+      <p:sp>
+        <p:nvSpPr>
+          <p:cNvPr id="34" name="frescura_celda_scored_4"/>
+          <p:cNvSpPr txBox="1"/>
+          <p:nvPr/>
+        </p:nvSpPr>
+        <p:spPr>
+          <a:xfrm>
+            <a:off x="8550942" y="2779776"/>
+            <a:ext cx="1745845" cy="603504"/>
+          </a:xfrm>
+          <a:prstGeom prst="rect">
+            <a:avLst/>
+          </a:prstGeom>
+          <a:noFill/>
+        </p:spPr>
+        <p:txBody>
+          <a:bodyPr wrap="square" anchor="ctr" lIns="73152" rIns="73152" tIns="18288" bIns="18288">
+            <a:spAutoFit/>
+          </a:bodyPr>
+          <a:lstStyle/>
+          <a:p>
+            <a:pPr algn="l"/>
+            <a:r>
+              <a:rPr sz="1100" b="0">
+                <a:solidFill>
+                  <a:srgbClr val="B9C8DC"/>
+                </a:solidFill>
+                <a:latin typeface="Segoe UI"/>
+              </a:rPr>
+              <a:t>Todos los días</a:t>
+            </a:r>
+          </a:p>
+        </p:txBody>
+      </p:sp>
+      <p:sp>
+        <p:nvSpPr>
+          <p:cNvPr id="35" name="frescura_chip_scored"/>
+          <p:cNvSpPr/>
+          <p:nvPr/>
+        </p:nvSpPr>
+        <p:spPr>
+          <a:xfrm>
+            <a:off x="10388228" y="2907792"/>
+            <a:ext cx="1071946" cy="347472"/>
+          </a:xfrm>
+          <a:prstGeom prst="roundRect">
+            <a:avLst>
+              <a:gd name="adj" fmla="val 18000"/>
+            </a:avLst>
+          </a:prstGeom>
+          <a:solidFill>
+            <a:srgbClr val="F2B441"/>
+          </a:solidFill>
+          <a:ln>
+            <a:noFill/>
+          </a:ln>
+          <a:effectLst/>
+        </p:spPr>
+        <p:style>
+          <a:lnRef idx="1">
+            <a:schemeClr val="accent1"/>
+          </a:lnRef>
+          <a:fillRef idx="3">
+            <a:schemeClr val="accent1"/>
+          </a:fillRef>
+          <a:effectRef idx="2">
+            <a:schemeClr val="accent1"/>
+          </a:effectRef>
+          <a:fontRef idx="minor">
+            <a:schemeClr val="lt1"/>
+          </a:fontRef>
+        </p:style>
+        <p:txBody>
+          <a:bodyPr rtlCol="0" anchor="ctr" lIns="36576" rIns="36576"/>
+          <a:lstStyle/>
+          <a:p>
+            <a:pPr algn="ctr"/>
+            <a:r>
+              <a:rPr sz="1100" b="1">
+                <a:solidFill>
+                  <a:srgbClr val="081527"/>
+                </a:solidFill>
+                <a:latin typeface="Segoe UI"/>
+              </a:rPr>
+              <a:t>Atrasada</a:t>
+            </a:r>
+          </a:p>
+        </p:txBody>
+      </p:sp>
+      <p:sp>
+        <p:nvSpPr>
+          <p:cNvPr id="36" name="frescura_fila_calidad"/>
+          <p:cNvSpPr/>
+          <p:nvPr/>
+        </p:nvSpPr>
+        <p:spPr>
+          <a:xfrm>
+            <a:off x="640080" y="3438144"/>
+            <a:ext cx="10911535" cy="603504"/>
+          </a:xfrm>
+          <a:prstGeom prst="roundRect">
+            <a:avLst>
+              <a:gd name="adj" fmla="val 18000"/>
+            </a:avLst>
+          </a:prstGeom>
+          <a:solidFill>
+            <a:srgbClr val="0E1E34"/>
+          </a:solidFill>
+          <a:ln>
+            <a:noFill/>
+          </a:ln>
+          <a:effectLst/>
+        </p:spPr>
+        <p:style>
+          <a:lnRef idx="1">
+            <a:schemeClr val="accent1"/>
+          </a:lnRef>
+          <a:fillRef idx="3">
+            <a:schemeClr val="accent1"/>
+          </a:fillRef>
+          <a:effectRef idx="2">
+            <a:schemeClr val="accent1"/>
+          </a:effectRef>
+          <a:fontRef idx="minor">
+            <a:schemeClr val="lt1"/>
+          </a:fontRef>
+        </p:style>
+        <p:txBody>
+          <a:bodyPr rtlCol="0" anchor="ctr"/>
+          <a:lstStyle/>
+          <a:p>
+            <a:pPr algn="ctr"/>
+          </a:p>
+        </p:txBody>
+      </p:sp>
+      <p:sp>
+        <p:nvSpPr>
+          <p:cNvPr id="37" name="Rounded Rectangle 36"/>
+          <p:cNvSpPr/>
+          <p:nvPr/>
+        </p:nvSpPr>
+        <p:spPr>
+          <a:xfrm>
+            <a:off x="694944" y="3529584"/>
+            <a:ext cx="64008" cy="420624"/>
+          </a:xfrm>
+          <a:prstGeom prst="roundRect">
+            <a:avLst>
+              <a:gd name="adj" fmla="val 18000"/>
+            </a:avLst>
+          </a:prstGeom>
+          <a:solidFill>
+            <a:srgbClr val="FF7675"/>
+          </a:solidFill>
+          <a:ln>
+            <a:noFill/>
+          </a:ln>
+          <a:effectLst/>
+        </p:spPr>
+        <p:style>
+          <a:lnRef idx="1">
+            <a:schemeClr val="accent1"/>
+          </a:lnRef>
+          <a:fillRef idx="3">
+            <a:schemeClr val="accent1"/>
+          </a:fillRef>
+          <a:effectRef idx="2">
+            <a:schemeClr val="accent1"/>
+          </a:effectRef>
+          <a:fontRef idx="minor">
+            <a:schemeClr val="lt1"/>
+          </a:fontRef>
+        </p:style>
+        <p:txBody>
+          <a:bodyPr rtlCol="0" anchor="ctr"/>
+          <a:lstStyle/>
+          <a:p>
+            <a:pPr algn="ctr"/>
+          </a:p>
+        </p:txBody>
+      </p:sp>
+      <p:sp>
+        <p:nvSpPr>
+          <p:cNvPr id="38" name="frescura_celda_calidad_0"/>
+          <p:cNvSpPr txBox="1"/>
+          <p:nvPr/>
+        </p:nvSpPr>
+        <p:spPr>
+          <a:xfrm>
+            <a:off x="768096" y="3438144"/>
+            <a:ext cx="3472790" cy="603504"/>
+          </a:xfrm>
+          <a:prstGeom prst="rect">
+            <a:avLst/>
+          </a:prstGeom>
+          <a:noFill/>
+        </p:spPr>
+        <p:txBody>
+          <a:bodyPr wrap="square" anchor="ctr" lIns="73152" rIns="73152" tIns="18288" bIns="18288">
+            <a:spAutoFit/>
+          </a:bodyPr>
+          <a:lstStyle/>
+          <a:p>
+            <a:pPr algn="l"/>
+            <a:r>
+              <a:rPr sz="1250" b="1">
+                <a:solidFill>
+                  <a:srgbClr val="EAF1FB"/>
+                </a:solidFill>
+                <a:latin typeface="Segoe UI"/>
+              </a:rPr>
+              <a:t>Evaluaciones de calidad</a:t>
+            </a:r>
+          </a:p>
+          <a:p>
+            <a:pPr algn="l"/>
+            <a:r>
+              <a:rPr sz="850" b="0">
+                <a:solidFill>
+                  <a:srgbClr val="9DB0C8"/>
+                </a:solidFill>
+                <a:latin typeface="Segoe UI"/>
+              </a:rPr>
+              <a:t>Todavía no se cargó nunca en esta instalación.</a:t>
+            </a:r>
+          </a:p>
+        </p:txBody>
+      </p:sp>
+      <p:sp>
+        <p:nvSpPr>
+          <p:cNvPr id="39" name="frescura_celda_calidad_1"/>
+          <p:cNvSpPr txBox="1"/>
+          <p:nvPr/>
+        </p:nvSpPr>
+        <p:spPr>
+          <a:xfrm>
+            <a:off x="4240886" y="3438144"/>
+            <a:ext cx="1800403" cy="603504"/>
+          </a:xfrm>
+          <a:prstGeom prst="rect">
+            <a:avLst/>
+          </a:prstGeom>
+          <a:noFill/>
+        </p:spPr>
+        <p:txBody>
+          <a:bodyPr wrap="square" anchor="ctr" lIns="73152" rIns="73152" tIns="18288" bIns="18288">
+            <a:spAutoFit/>
+          </a:bodyPr>
+          <a:lstStyle/>
+          <a:p>
+            <a:pPr algn="l"/>
+            <a:r>
+              <a:rPr sz="1200" b="0">
+                <a:solidFill>
+                  <a:srgbClr val="EAF1FB"/>
+                </a:solidFill>
+                <a:latin typeface="Segoe UI"/>
+              </a:rPr>
+              <a:t>—</a:t>
+            </a:r>
+          </a:p>
+        </p:txBody>
+      </p:sp>
+      <p:sp>
+        <p:nvSpPr>
+          <p:cNvPr id="40" name="frescura_celda_calidad_2"/>
+          <p:cNvSpPr txBox="1"/>
+          <p:nvPr/>
+        </p:nvSpPr>
+        <p:spPr>
+          <a:xfrm>
+            <a:off x="6041289" y="3438144"/>
+            <a:ext cx="1418499" cy="603504"/>
+          </a:xfrm>
+          <a:prstGeom prst="rect">
+            <a:avLst/>
+          </a:prstGeom>
+          <a:noFill/>
+        </p:spPr>
+        <p:txBody>
+          <a:bodyPr wrap="square" anchor="ctr" lIns="73152" rIns="73152" tIns="18288" bIns="18288">
+            <a:spAutoFit/>
+          </a:bodyPr>
+          <a:lstStyle/>
+          <a:p>
+            <a:pPr algn="l"/>
+            <a:r>
+              <a:rPr sz="1200" b="0">
+                <a:solidFill>
+                  <a:srgbClr val="EAF1FB"/>
+                </a:solidFill>
+                <a:latin typeface="Segoe UI"/>
+              </a:rPr>
+              <a:t>—</a:t>
+            </a:r>
+          </a:p>
+        </p:txBody>
+      </p:sp>
+      <p:sp>
+        <p:nvSpPr>
+          <p:cNvPr id="41" name="frescura_celda_calidad_3"/>
+          <p:cNvSpPr txBox="1"/>
+          <p:nvPr/>
+        </p:nvSpPr>
+        <p:spPr>
+          <a:xfrm>
+            <a:off x="7459789" y="3438144"/>
+            <a:ext cx="1091153" cy="603504"/>
+          </a:xfrm>
+          <a:prstGeom prst="rect">
+            <a:avLst/>
+          </a:prstGeom>
+          <a:noFill/>
+        </p:spPr>
+        <p:txBody>
+          <a:bodyPr wrap="square" anchor="ctr" lIns="73152" rIns="73152" tIns="18288" bIns="18288">
+            <a:spAutoFit/>
+          </a:bodyPr>
+          <a:lstStyle/>
+          <a:p>
+            <a:pPr algn="r"/>
+            <a:r>
+              <a:rPr sz="1200" b="0">
+                <a:solidFill>
+                  <a:srgbClr val="EAF1FB"/>
+                </a:solidFill>
+                <a:latin typeface="Segoe UI"/>
+              </a:rPr>
+              <a:t>—</a:t>
+            </a:r>
+          </a:p>
+        </p:txBody>
+      </p:sp>
+      <p:sp>
+        <p:nvSpPr>
+          <p:cNvPr id="42" name="frescura_celda_calidad_4"/>
+          <p:cNvSpPr txBox="1"/>
+          <p:nvPr/>
+        </p:nvSpPr>
+        <p:spPr>
+          <a:xfrm>
+            <a:off x="8550942" y="3438144"/>
+            <a:ext cx="1745845" cy="603504"/>
+          </a:xfrm>
+          <a:prstGeom prst="rect">
+            <a:avLst/>
+          </a:prstGeom>
+          <a:noFill/>
+        </p:spPr>
+        <p:txBody>
+          <a:bodyPr wrap="square" anchor="ctr" lIns="73152" rIns="73152" tIns="18288" bIns="18288">
+            <a:spAutoFit/>
+          </a:bodyPr>
+          <a:lstStyle/>
+          <a:p>
+            <a:pPr algn="l"/>
+            <a:r>
+              <a:rPr sz="1100" b="0">
+                <a:solidFill>
+                  <a:srgbClr val="B9C8DC"/>
+                </a:solidFill>
+                <a:latin typeface="Segoe UI"/>
+              </a:rPr>
+              <a:t>Todas las semanas</a:t>
+            </a:r>
+          </a:p>
+        </p:txBody>
+      </p:sp>
+      <p:sp>
+        <p:nvSpPr>
+          <p:cNvPr id="43" name="frescura_chip_calidad"/>
+          <p:cNvSpPr/>
+          <p:nvPr/>
+        </p:nvSpPr>
+        <p:spPr>
+          <a:xfrm>
+            <a:off x="10388228" y="3566160"/>
+            <a:ext cx="1071946" cy="347472"/>
+          </a:xfrm>
+          <a:prstGeom prst="roundRect">
+            <a:avLst>
+              <a:gd name="adj" fmla="val 18000"/>
+            </a:avLst>
+          </a:prstGeom>
+          <a:solidFill>
+            <a:srgbClr val="FF7675"/>
+          </a:solidFill>
+          <a:ln>
+            <a:noFill/>
+          </a:ln>
+          <a:effectLst/>
+        </p:spPr>
+        <p:style>
+          <a:lnRef idx="1">
+            <a:schemeClr val="accent1"/>
+          </a:lnRef>
+          <a:fillRef idx="3">
+            <a:schemeClr val="accent1"/>
+          </a:fillRef>
+          <a:effectRef idx="2">
+            <a:schemeClr val="accent1"/>
+          </a:effectRef>
+          <a:fontRef idx="minor">
+            <a:schemeClr val="lt1"/>
+          </a:fontRef>
+        </p:style>
+        <p:txBody>
+          <a:bodyPr rtlCol="0" anchor="ctr" lIns="36576" rIns="36576"/>
+          <a:lstStyle/>
+          <a:p>
+            <a:pPr algn="ctr"/>
+            <a:r>
+              <a:rPr sz="1100" b="1">
+                <a:solidFill>
+                  <a:srgbClr val="081527"/>
+                </a:solidFill>
+                <a:latin typeface="Segoe UI"/>
+              </a:rPr>
+              <a:t>Sin cargar</a:t>
+            </a:r>
+          </a:p>
+        </p:txBody>
+      </p:sp>
+      <p:sp>
+        <p:nvSpPr>
+          <p:cNvPr id="44" name="frescura_fila_cartera_real"/>
+          <p:cNvSpPr/>
+          <p:nvPr/>
+        </p:nvSpPr>
+        <p:spPr>
+          <a:xfrm>
+            <a:off x="640080" y="4096512"/>
+            <a:ext cx="10911535" cy="603504"/>
+          </a:xfrm>
+          <a:prstGeom prst="roundRect">
+            <a:avLst>
+              <a:gd name="adj" fmla="val 18000"/>
+            </a:avLst>
+          </a:prstGeom>
+          <a:solidFill>
+            <a:srgbClr val="0E1E34"/>
+          </a:solidFill>
+          <a:ln>
+            <a:noFill/>
+          </a:ln>
+          <a:effectLst/>
+        </p:spPr>
+        <p:style>
+          <a:lnRef idx="1">
+            <a:schemeClr val="accent1"/>
+          </a:lnRef>
+          <a:fillRef idx="3">
+            <a:schemeClr val="accent1"/>
+          </a:fillRef>
+          <a:effectRef idx="2">
+            <a:schemeClr val="accent1"/>
+          </a:effectRef>
+          <a:fontRef idx="minor">
+            <a:schemeClr val="lt1"/>
+          </a:fontRef>
+        </p:style>
+        <p:txBody>
+          <a:bodyPr rtlCol="0" anchor="ctr"/>
+          <a:lstStyle/>
+          <a:p>
+            <a:pPr algn="ctr"/>
+          </a:p>
+        </p:txBody>
+      </p:sp>
+      <p:sp>
+        <p:nvSpPr>
+          <p:cNvPr id="45" name="Rounded Rectangle 44"/>
+          <p:cNvSpPr/>
+          <p:nvPr/>
+        </p:nvSpPr>
+        <p:spPr>
+          <a:xfrm>
+            <a:off x="694944" y="4187952"/>
+            <a:ext cx="64008" cy="420624"/>
+          </a:xfrm>
+          <a:prstGeom prst="roundRect">
+            <a:avLst>
+              <a:gd name="adj" fmla="val 18000"/>
+            </a:avLst>
+          </a:prstGeom>
+          <a:solidFill>
+            <a:srgbClr val="FF7675"/>
+          </a:solidFill>
+          <a:ln>
+            <a:noFill/>
+          </a:ln>
+          <a:effectLst/>
+        </p:spPr>
+        <p:style>
+          <a:lnRef idx="1">
+            <a:schemeClr val="accent1"/>
+          </a:lnRef>
+          <a:fillRef idx="3">
+            <a:schemeClr val="accent1"/>
+          </a:fillRef>
+          <a:effectRef idx="2">
+            <a:schemeClr val="accent1"/>
+          </a:effectRef>
+          <a:fontRef idx="minor">
+            <a:schemeClr val="lt1"/>
+          </a:fontRef>
+        </p:style>
+        <p:txBody>
+          <a:bodyPr rtlCol="0" anchor="ctr"/>
+          <a:lstStyle/>
+          <a:p>
+            <a:pPr algn="ctr"/>
+          </a:p>
+        </p:txBody>
+      </p:sp>
+      <p:sp>
+        <p:nvSpPr>
+          <p:cNvPr id="46" name="frescura_celda_cartera_real_0"/>
+          <p:cNvSpPr txBox="1"/>
+          <p:nvPr/>
+        </p:nvSpPr>
+        <p:spPr>
+          <a:xfrm>
+            <a:off x="768096" y="4096512"/>
+            <a:ext cx="3472790" cy="603504"/>
+          </a:xfrm>
+          <a:prstGeom prst="rect">
+            <a:avLst/>
+          </a:prstGeom>
+          <a:noFill/>
+        </p:spPr>
+        <p:txBody>
+          <a:bodyPr wrap="square" anchor="ctr" lIns="73152" rIns="73152" tIns="18288" bIns="18288">
+            <a:spAutoFit/>
+          </a:bodyPr>
+          <a:lstStyle/>
+          <a:p>
+            <a:pPr algn="l"/>
+            <a:r>
+              <a:rPr sz="1250" b="1">
+                <a:solidFill>
+                  <a:srgbClr val="EAF1FB"/>
+                </a:solidFill>
+                <a:latin typeface="Segoe UI"/>
+              </a:rPr>
+              <a:t>Cartera real importada</a:t>
+            </a:r>
+          </a:p>
+          <a:p>
+            <a:pPr algn="l"/>
+            <a:r>
+              <a:rPr sz="850" b="0">
+                <a:solidFill>
+                  <a:srgbClr val="9DB0C8"/>
+                </a:solidFill>
+                <a:latin typeface="Segoe UI"/>
+              </a:rPr>
+              <a:t>Todavía no se cargó nunca en esta instalación.</a:t>
+            </a:r>
+          </a:p>
+        </p:txBody>
+      </p:sp>
+      <p:sp>
+        <p:nvSpPr>
+          <p:cNvPr id="47" name="frescura_celda_cartera_real_1"/>
+          <p:cNvSpPr txBox="1"/>
+          <p:nvPr/>
+        </p:nvSpPr>
+        <p:spPr>
+          <a:xfrm>
+            <a:off x="4240886" y="4096512"/>
+            <a:ext cx="1800403" cy="603504"/>
+          </a:xfrm>
+          <a:prstGeom prst="rect">
+            <a:avLst/>
+          </a:prstGeom>
+          <a:noFill/>
+        </p:spPr>
+        <p:txBody>
+          <a:bodyPr wrap="square" anchor="ctr" lIns="73152" rIns="73152" tIns="18288" bIns="18288">
+            <a:spAutoFit/>
+          </a:bodyPr>
+          <a:lstStyle/>
+          <a:p>
+            <a:pPr algn="l"/>
+            <a:r>
+              <a:rPr sz="1200" b="0">
+                <a:solidFill>
+                  <a:srgbClr val="EAF1FB"/>
+                </a:solidFill>
+                <a:latin typeface="Segoe UI"/>
+              </a:rPr>
+              <a:t>—</a:t>
+            </a:r>
+          </a:p>
+        </p:txBody>
+      </p:sp>
+      <p:sp>
+        <p:nvSpPr>
+          <p:cNvPr id="48" name="frescura_celda_cartera_real_2"/>
+          <p:cNvSpPr txBox="1"/>
+          <p:nvPr/>
+        </p:nvSpPr>
+        <p:spPr>
+          <a:xfrm>
+            <a:off x="6041289" y="4096512"/>
+            <a:ext cx="1418499" cy="603504"/>
+          </a:xfrm>
+          <a:prstGeom prst="rect">
+            <a:avLst/>
+          </a:prstGeom>
+          <a:noFill/>
+        </p:spPr>
+        <p:txBody>
+          <a:bodyPr wrap="square" anchor="ctr" lIns="73152" rIns="73152" tIns="18288" bIns="18288">
+            <a:spAutoFit/>
+          </a:bodyPr>
+          <a:lstStyle/>
+          <a:p>
+            <a:pPr algn="l"/>
+            <a:r>
+              <a:rPr sz="1200" b="0">
+                <a:solidFill>
+                  <a:srgbClr val="EAF1FB"/>
+                </a:solidFill>
+                <a:latin typeface="Segoe UI"/>
+              </a:rPr>
+              <a:t>—</a:t>
+            </a:r>
+          </a:p>
+        </p:txBody>
+      </p:sp>
+      <p:sp>
+        <p:nvSpPr>
+          <p:cNvPr id="49" name="frescura_celda_cartera_real_3"/>
+          <p:cNvSpPr txBox="1"/>
+          <p:nvPr/>
+        </p:nvSpPr>
+        <p:spPr>
+          <a:xfrm>
+            <a:off x="7459789" y="4096512"/>
+            <a:ext cx="1091153" cy="603504"/>
+          </a:xfrm>
+          <a:prstGeom prst="rect">
+            <a:avLst/>
+          </a:prstGeom>
+          <a:noFill/>
+        </p:spPr>
+        <p:txBody>
+          <a:bodyPr wrap="square" anchor="ctr" lIns="73152" rIns="73152" tIns="18288" bIns="18288">
+            <a:spAutoFit/>
+          </a:bodyPr>
+          <a:lstStyle/>
+          <a:p>
+            <a:pPr algn="r"/>
+            <a:r>
+              <a:rPr sz="1200" b="0">
+                <a:solidFill>
+                  <a:srgbClr val="EAF1FB"/>
+                </a:solidFill>
+                <a:latin typeface="Segoe UI"/>
+              </a:rPr>
+              <a:t>—</a:t>
+            </a:r>
+          </a:p>
+        </p:txBody>
+      </p:sp>
+      <p:sp>
+        <p:nvSpPr>
+          <p:cNvPr id="50" name="frescura_celda_cartera_real_4"/>
+          <p:cNvSpPr txBox="1"/>
+          <p:nvPr/>
+        </p:nvSpPr>
+        <p:spPr>
+          <a:xfrm>
+            <a:off x="8550942" y="4096512"/>
+            <a:ext cx="1745845" cy="603504"/>
+          </a:xfrm>
+          <a:prstGeom prst="rect">
+            <a:avLst/>
+          </a:prstGeom>
+          <a:noFill/>
+        </p:spPr>
+        <p:txBody>
+          <a:bodyPr wrap="square" anchor="ctr" lIns="73152" rIns="73152" tIns="18288" bIns="18288">
+            <a:spAutoFit/>
+          </a:bodyPr>
+          <a:lstStyle/>
+          <a:p>
+            <a:pPr algn="l"/>
+            <a:r>
+              <a:rPr sz="1100" b="0">
+                <a:solidFill>
+                  <a:srgbClr val="B9C8DC"/>
+                </a:solidFill>
+                <a:latin typeface="Segoe UI"/>
+              </a:rPr>
+              <a:t>Cuando alguien la sube</a:t>
+            </a:r>
+          </a:p>
+        </p:txBody>
+      </p:sp>
+      <p:sp>
+        <p:nvSpPr>
+          <p:cNvPr id="51" name="frescura_chip_cartera_real"/>
+          <p:cNvSpPr/>
+          <p:nvPr/>
+        </p:nvSpPr>
+        <p:spPr>
+          <a:xfrm>
+            <a:off x="10388228" y="4224528"/>
+            <a:ext cx="1071946" cy="347472"/>
+          </a:xfrm>
+          <a:prstGeom prst="roundRect">
+            <a:avLst>
+              <a:gd name="adj" fmla="val 18000"/>
+            </a:avLst>
+          </a:prstGeom>
+          <a:solidFill>
+            <a:srgbClr val="FF7675"/>
+          </a:solidFill>
+          <a:ln>
+            <a:noFill/>
+          </a:ln>
+          <a:effectLst/>
+        </p:spPr>
+        <p:style>
+          <a:lnRef idx="1">
+            <a:schemeClr val="accent1"/>
+          </a:lnRef>
+          <a:fillRef idx="3">
+            <a:schemeClr val="accent1"/>
+          </a:fillRef>
+          <a:effectRef idx="2">
+            <a:schemeClr val="accent1"/>
+          </a:effectRef>
+          <a:fontRef idx="minor">
+            <a:schemeClr val="lt1"/>
+          </a:fontRef>
+        </p:style>
+        <p:txBody>
+          <a:bodyPr rtlCol="0" anchor="ctr" lIns="36576" rIns="36576"/>
+          <a:lstStyle/>
+          <a:p>
+            <a:pPr algn="ctr"/>
+            <a:r>
+              <a:rPr sz="1100" b="1">
+                <a:solidFill>
+                  <a:srgbClr val="081527"/>
+                </a:solidFill>
+                <a:latin typeface="Segoe UI"/>
+              </a:rPr>
+              <a:t>Sin cargar</a:t>
+            </a:r>
+          </a:p>
+        </p:txBody>
+      </p:sp>
+      <p:sp>
+        <p:nvSpPr>
+          <p:cNvPr id="52" name="frescura_fila_modelo"/>
+          <p:cNvSpPr/>
+          <p:nvPr/>
+        </p:nvSpPr>
+        <p:spPr>
+          <a:xfrm>
+            <a:off x="640080" y="4754880"/>
+            <a:ext cx="10911535" cy="603504"/>
+          </a:xfrm>
+          <a:prstGeom prst="roundRect">
+            <a:avLst>
+              <a:gd name="adj" fmla="val 18000"/>
+            </a:avLst>
+          </a:prstGeom>
+          <a:solidFill>
+            <a:srgbClr val="0E1E34"/>
+          </a:solidFill>
+          <a:ln>
+            <a:noFill/>
+          </a:ln>
+          <a:effectLst/>
+        </p:spPr>
+        <p:style>
+          <a:lnRef idx="1">
+            <a:schemeClr val="accent1"/>
+          </a:lnRef>
+          <a:fillRef idx="3">
+            <a:schemeClr val="accent1"/>
+          </a:fillRef>
+          <a:effectRef idx="2">
+            <a:schemeClr val="accent1"/>
+          </a:effectRef>
+          <a:fontRef idx="minor">
+            <a:schemeClr val="lt1"/>
+          </a:fontRef>
+        </p:style>
+        <p:txBody>
+          <a:bodyPr rtlCol="0" anchor="ctr"/>
+          <a:lstStyle/>
+          <a:p>
+            <a:pPr algn="ctr"/>
+          </a:p>
+        </p:txBody>
+      </p:sp>
+      <p:sp>
+        <p:nvSpPr>
+          <p:cNvPr id="53" name="Rounded Rectangle 52"/>
+          <p:cNvSpPr/>
+          <p:nvPr/>
+        </p:nvSpPr>
+        <p:spPr>
+          <a:xfrm>
+            <a:off x="694944" y="4846320"/>
+            <a:ext cx="64008" cy="420624"/>
+          </a:xfrm>
+          <a:prstGeom prst="roundRect">
+            <a:avLst>
+              <a:gd name="adj" fmla="val 18000"/>
+            </a:avLst>
+          </a:prstGeom>
+          <a:solidFill>
+            <a:srgbClr val="00C896"/>
+          </a:solidFill>
+          <a:ln>
+            <a:noFill/>
+          </a:ln>
+          <a:effectLst/>
+        </p:spPr>
+        <p:style>
+          <a:lnRef idx="1">
+            <a:schemeClr val="accent1"/>
+          </a:lnRef>
+          <a:fillRef idx="3">
+            <a:schemeClr val="accent1"/>
+          </a:fillRef>
+          <a:effectRef idx="2">
+            <a:schemeClr val="accent1"/>
+          </a:effectRef>
+          <a:fontRef idx="minor">
+            <a:schemeClr val="lt1"/>
+          </a:fontRef>
+        </p:style>
+        <p:txBody>
+          <a:bodyPr rtlCol="0" anchor="ctr"/>
+          <a:lstStyle/>
+          <a:p>
+            <a:pPr algn="ctr"/>
+          </a:p>
+        </p:txBody>
+      </p:sp>
+      <p:sp>
+        <p:nvSpPr>
+          <p:cNvPr id="54" name="frescura_celda_modelo_0"/>
+          <p:cNvSpPr txBox="1"/>
+          <p:nvPr/>
+        </p:nvSpPr>
+        <p:spPr>
+          <a:xfrm>
+            <a:off x="768096" y="4754880"/>
+            <a:ext cx="3472790" cy="603504"/>
+          </a:xfrm>
+          <a:prstGeom prst="rect">
+            <a:avLst/>
+          </a:prstGeom>
+          <a:noFill/>
+        </p:spPr>
+        <p:txBody>
+          <a:bodyPr wrap="square" anchor="ctr" lIns="73152" rIns="73152" tIns="18288" bIns="18288">
+            <a:spAutoFit/>
+          </a:bodyPr>
+          <a:lstStyle/>
+          <a:p>
+            <a:pPr algn="l"/>
+            <a:r>
+              <a:rPr sz="1250" b="1">
+                <a:solidFill>
+                  <a:srgbClr val="EAF1FB"/>
+                </a:solidFill>
+                <a:latin typeface="Segoe UI"/>
+              </a:rPr>
+              <a:t>Modelo ProbPago entrenado</a:t>
+            </a:r>
+          </a:p>
+          <a:p>
+            <a:pPr algn="l"/>
+            <a:r>
+              <a:rPr sz="850" b="0">
+                <a:solidFill>
+                  <a:srgbClr val="9DB0C8"/>
+                </a:solidFill>
+                <a:latin typeface="Segoe UI"/>
+              </a:rPr>
+              <a:t>Próxima carga esperada: 2026-10-05 12:43</a:t>
+            </a:r>
+          </a:p>
+        </p:txBody>
+      </p:sp>
+      <p:sp>
+        <p:nvSpPr>
+          <p:cNvPr id="55" name="frescura_celda_modelo_1"/>
+          <p:cNvSpPr txBox="1"/>
+          <p:nvPr/>
+        </p:nvSpPr>
+        <p:spPr>
+          <a:xfrm>
+            <a:off x="4240886" y="4754880"/>
+            <a:ext cx="1800403" cy="603504"/>
+          </a:xfrm>
+          <a:prstGeom prst="rect">
+            <a:avLst/>
+          </a:prstGeom>
+          <a:noFill/>
+        </p:spPr>
+        <p:txBody>
+          <a:bodyPr wrap="square" anchor="ctr" lIns="73152" rIns="73152" tIns="18288" bIns="18288">
+            <a:spAutoFit/>
+          </a:bodyPr>
+          <a:lstStyle/>
+          <a:p>
+            <a:pPr algn="l"/>
+            <a:r>
+              <a:rPr sz="1200" b="0">
+                <a:solidFill>
+                  <a:srgbClr val="EAF1FB"/>
+                </a:solidFill>
+                <a:latin typeface="Segoe UI"/>
+              </a:rPr>
+              <a:t>2026-09-05 12:43</a:t>
+            </a:r>
+          </a:p>
+          <a:p>
+            <a:pPr algn="l"/>
+            <a:r>
+              <a:rPr sz="900" b="0">
+                <a:solidFill>
+                  <a:srgbClr val="9DB0C8"/>
+                </a:solidFill>
+                <a:latin typeface="Segoe UI"/>
+              </a:rPr>
+              <a:t>sábado</a:t>
+            </a:r>
+          </a:p>
+        </p:txBody>
+      </p:sp>
+      <p:sp>
+        <p:nvSpPr>
+          <p:cNvPr id="56" name="frescura_celda_modelo_2"/>
+          <p:cNvSpPr txBox="1"/>
+          <p:nvPr/>
+        </p:nvSpPr>
+        <p:spPr>
+          <a:xfrm>
+            <a:off x="6041289" y="4754880"/>
+            <a:ext cx="1418499" cy="603504"/>
+          </a:xfrm>
+          <a:prstGeom prst="rect">
+            <a:avLst/>
+          </a:prstGeom>
+          <a:noFill/>
+        </p:spPr>
+        <p:txBody>
+          <a:bodyPr wrap="square" anchor="ctr" lIns="73152" rIns="73152" tIns="18288" bIns="18288">
+            <a:spAutoFit/>
+          </a:bodyPr>
+          <a:lstStyle/>
+          <a:p>
+            <a:pPr algn="l"/>
+            <a:r>
+              <a:rPr sz="1200" b="0">
+                <a:solidFill>
+                  <a:srgbClr val="EAF1FB"/>
+                </a:solidFill>
+                <a:latin typeface="Segoe UI"/>
+              </a:rPr>
+              <a:t>—</a:t>
+            </a:r>
+          </a:p>
+        </p:txBody>
+      </p:sp>
+      <p:sp>
+        <p:nvSpPr>
+          <p:cNvPr id="57" name="frescura_celda_modelo_3"/>
+          <p:cNvSpPr txBox="1"/>
+          <p:nvPr/>
+        </p:nvSpPr>
+        <p:spPr>
+          <a:xfrm>
+            <a:off x="7459789" y="4754880"/>
+            <a:ext cx="1091153" cy="603504"/>
+          </a:xfrm>
+          <a:prstGeom prst="rect">
+            <a:avLst/>
+          </a:prstGeom>
+          <a:noFill/>
+        </p:spPr>
+        <p:txBody>
+          <a:bodyPr wrap="square" anchor="ctr" lIns="73152" rIns="73152" tIns="18288" bIns="18288">
+            <a:spAutoFit/>
+          </a:bodyPr>
+          <a:lstStyle/>
+          <a:p>
+            <a:pPr algn="r"/>
+            <a:r>
+              <a:rPr sz="1200" b="0">
+                <a:solidFill>
+                  <a:srgbClr val="EAF1FB"/>
+                </a:solidFill>
+                <a:latin typeface="Segoe UI"/>
+              </a:rPr>
+              <a:t>—</a:t>
+            </a:r>
+          </a:p>
+        </p:txBody>
+      </p:sp>
+      <p:sp>
+        <p:nvSpPr>
+          <p:cNvPr id="58" name="frescura_celda_modelo_4"/>
+          <p:cNvSpPr txBox="1"/>
+          <p:nvPr/>
+        </p:nvSpPr>
+        <p:spPr>
+          <a:xfrm>
+            <a:off x="8550942" y="4754880"/>
+            <a:ext cx="1745845" cy="603504"/>
+          </a:xfrm>
+          <a:prstGeom prst="rect">
+            <a:avLst/>
+          </a:prstGeom>
+          <a:noFill/>
+        </p:spPr>
+        <p:txBody>
+          <a:bodyPr wrap="square" anchor="ctr" lIns="73152" rIns="73152" tIns="18288" bIns="18288">
+            <a:spAutoFit/>
+          </a:bodyPr>
+          <a:lstStyle/>
+          <a:p>
+            <a:pPr algn="l"/>
+            <a:r>
+              <a:rPr sz="1100" b="0">
+                <a:solidFill>
+                  <a:srgbClr val="B9C8DC"/>
+                </a:solidFill>
+                <a:latin typeface="Segoe UI"/>
+              </a:rPr>
+              <a:t>Todos los meses</a:t>
+            </a:r>
+          </a:p>
+        </p:txBody>
+      </p:sp>
+      <p:sp>
+        <p:nvSpPr>
+          <p:cNvPr id="59" name="frescura_chip_modelo"/>
+          <p:cNvSpPr/>
+          <p:nvPr/>
+        </p:nvSpPr>
+        <p:spPr>
+          <a:xfrm>
+            <a:off x="10388228" y="4882896"/>
+            <a:ext cx="1071946" cy="347472"/>
+          </a:xfrm>
+          <a:prstGeom prst="roundRect">
+            <a:avLst>
+              <a:gd name="adj" fmla="val 18000"/>
+            </a:avLst>
+          </a:prstGeom>
+          <a:solidFill>
+            <a:srgbClr val="00C896"/>
+          </a:solidFill>
+          <a:ln>
+            <a:noFill/>
+          </a:ln>
+          <a:effectLst/>
+        </p:spPr>
+        <p:style>
+          <a:lnRef idx="1">
+            <a:schemeClr val="accent1"/>
+          </a:lnRef>
+          <a:fillRef idx="3">
+            <a:schemeClr val="accent1"/>
+          </a:fillRef>
+          <a:effectRef idx="2">
+            <a:schemeClr val="accent1"/>
+          </a:effectRef>
+          <a:fontRef idx="minor">
+            <a:schemeClr val="lt1"/>
+          </a:fontRef>
+        </p:style>
+        <p:txBody>
+          <a:bodyPr rtlCol="0" anchor="ctr" lIns="36576" rIns="36576"/>
+          <a:lstStyle/>
+          <a:p>
+            <a:pPr algn="ctr"/>
+            <a:r>
+              <a:rPr sz="1100" b="1">
+                <a:solidFill>
+                  <a:srgbClr val="081527"/>
+                </a:solidFill>
+                <a:latin typeface="Segoe UI"/>
+              </a:rPr>
+              <a:t>Al día</a:t>
+            </a:r>
+          </a:p>
+        </p:txBody>
+      </p:sp>
+      <p:sp>
+        <p:nvSpPr>
+          <p:cNvPr id="60" name="frescura_fila_gestiones"/>
+          <p:cNvSpPr/>
+          <p:nvPr/>
+        </p:nvSpPr>
+        <p:spPr>
+          <a:xfrm>
+            <a:off x="640080" y="5413248"/>
+            <a:ext cx="10911535" cy="603504"/>
+          </a:xfrm>
+          <a:prstGeom prst="roundRect">
+            <a:avLst>
+              <a:gd name="adj" fmla="val 18000"/>
+            </a:avLst>
+          </a:prstGeom>
+          <a:solidFill>
+            <a:srgbClr val="0E1E34"/>
+          </a:solidFill>
+          <a:ln>
+            <a:noFill/>
+          </a:ln>
+          <a:effectLst/>
+        </p:spPr>
+        <p:style>
+          <a:lnRef idx="1">
+            <a:schemeClr val="accent1"/>
+          </a:lnRef>
+          <a:fillRef idx="3">
+            <a:schemeClr val="accent1"/>
+          </a:fillRef>
+          <a:effectRef idx="2">
+            <a:schemeClr val="accent1"/>
+          </a:effectRef>
+          <a:fontRef idx="minor">
+            <a:schemeClr val="lt1"/>
+          </a:fontRef>
+        </p:style>
+        <p:txBody>
+          <a:bodyPr rtlCol="0" anchor="ctr"/>
+          <a:lstStyle/>
+          <a:p>
+            <a:pPr algn="ctr"/>
+          </a:p>
+        </p:txBody>
+      </p:sp>
+      <p:sp>
+        <p:nvSpPr>
+          <p:cNvPr id="61" name="Rounded Rectangle 60"/>
+          <p:cNvSpPr/>
+          <p:nvPr/>
+        </p:nvSpPr>
+        <p:spPr>
+          <a:xfrm>
+            <a:off x="694944" y="5504688"/>
+            <a:ext cx="64008" cy="420624"/>
+          </a:xfrm>
+          <a:prstGeom prst="roundRect">
+            <a:avLst>
+              <a:gd name="adj" fmla="val 18000"/>
+            </a:avLst>
+          </a:prstGeom>
+          <a:solidFill>
+            <a:srgbClr val="00C896"/>
+          </a:solidFill>
+          <a:ln>
+            <a:noFill/>
+          </a:ln>
+          <a:effectLst/>
+        </p:spPr>
+        <p:style>
+          <a:lnRef idx="1">
+            <a:schemeClr val="accent1"/>
+          </a:lnRef>
+          <a:fillRef idx="3">
+            <a:schemeClr val="accent1"/>
+          </a:fillRef>
+          <a:effectRef idx="2">
+            <a:schemeClr val="accent1"/>
+          </a:effectRef>
+          <a:fontRef idx="minor">
+            <a:schemeClr val="lt1"/>
+          </a:fontRef>
+        </p:style>
+        <p:txBody>
+          <a:bodyPr rtlCol="0" anchor="ctr"/>
+          <a:lstStyle/>
+          <a:p>
+            <a:pPr algn="ctr"/>
+          </a:p>
+        </p:txBody>
+      </p:sp>
+      <p:sp>
+        <p:nvSpPr>
+          <p:cNvPr id="62" name="frescura_celda_gestiones_0"/>
+          <p:cNvSpPr txBox="1"/>
+          <p:nvPr/>
+        </p:nvSpPr>
+        <p:spPr>
+          <a:xfrm>
+            <a:off x="768096" y="5413248"/>
+            <a:ext cx="3472790" cy="603504"/>
+          </a:xfrm>
+          <a:prstGeom prst="rect">
+            <a:avLst/>
+          </a:prstGeom>
+          <a:noFill/>
+        </p:spPr>
+        <p:txBody>
+          <a:bodyPr wrap="square" anchor="ctr" lIns="73152" rIns="73152" tIns="18288" bIns="18288">
+            <a:spAutoFit/>
+          </a:bodyPr>
+          <a:lstStyle/>
+          <a:p>
+            <a:pPr algn="l"/>
+            <a:r>
+              <a:rPr sz="1250" b="1">
+                <a:solidFill>
+                  <a:srgbClr val="EAF1FB"/>
+                </a:solidFill>
+                <a:latin typeface="Segoe UI"/>
+              </a:rPr>
+              <a:t>Historial de gestiones</a:t>
+            </a:r>
+          </a:p>
+          <a:p>
+            <a:pPr algn="l"/>
+            <a:r>
+              <a:rPr sz="850" b="0">
+                <a:solidFill>
+                  <a:srgbClr val="9DB0C8"/>
+                </a:solidFill>
+                <a:latin typeface="Segoe UI"/>
+              </a:rPr>
+              <a:t>Próxima carga esperada: 2026-09-24 19:28</a:t>
+            </a:r>
+          </a:p>
+        </p:txBody>
+      </p:sp>
+      <p:sp>
+        <p:nvSpPr>
+          <p:cNvPr id="63" name="frescura_celda_gestiones_1"/>
+          <p:cNvSpPr txBox="1"/>
+          <p:nvPr/>
+        </p:nvSpPr>
+        <p:spPr>
+          <a:xfrm>
+            <a:off x="4240886" y="5413248"/>
+            <a:ext cx="1800403" cy="603504"/>
+          </a:xfrm>
+          <a:prstGeom prst="rect">
+            <a:avLst/>
+          </a:prstGeom>
+          <a:noFill/>
+        </p:spPr>
+        <p:txBody>
+          <a:bodyPr wrap="square" anchor="ctr" lIns="73152" rIns="73152" tIns="18288" bIns="18288">
+            <a:spAutoFit/>
+          </a:bodyPr>
+          <a:lstStyle/>
+          <a:p>
+            <a:pPr algn="l"/>
+            <a:r>
+              <a:rPr sz="1200" b="0">
+                <a:solidFill>
+                  <a:srgbClr val="EAF1FB"/>
+                </a:solidFill>
+                <a:latin typeface="Segoe UI"/>
+              </a:rPr>
+              <a:t>2026-09-23 19:28</a:t>
+            </a:r>
+          </a:p>
+          <a:p>
+            <a:pPr algn="l"/>
+            <a:r>
+              <a:rPr sz="900" b="0">
+                <a:solidFill>
+                  <a:srgbClr val="9DB0C8"/>
+                </a:solidFill>
+                <a:latin typeface="Segoe UI"/>
+              </a:rPr>
+              <a:t>miércoles</a:t>
+            </a:r>
+          </a:p>
+        </p:txBody>
+      </p:sp>
+      <p:sp>
+        <p:nvSpPr>
+          <p:cNvPr id="64" name="frescura_celda_gestiones_2"/>
+          <p:cNvSpPr txBox="1"/>
+          <p:nvPr/>
+        </p:nvSpPr>
+        <p:spPr>
+          <a:xfrm>
+            <a:off x="6041289" y="5413248"/>
+            <a:ext cx="1418499" cy="603504"/>
+          </a:xfrm>
+          <a:prstGeom prst="rect">
+            <a:avLst/>
+          </a:prstGeom>
+          <a:noFill/>
+        </p:spPr>
+        <p:txBody>
+          <a:bodyPr wrap="square" anchor="ctr" lIns="73152" rIns="73152" tIns="18288" bIns="18288">
+            <a:spAutoFit/>
+          </a:bodyPr>
+          <a:lstStyle/>
+          <a:p>
+            <a:pPr algn="l"/>
+            <a:r>
+              <a:rPr sz="1200" b="0">
+                <a:solidFill>
+                  <a:srgbClr val="EAF1FB"/>
+                </a:solidFill>
+                <a:latin typeface="Segoe UI"/>
+              </a:rPr>
+              <a:t>2026-06-30</a:t>
+            </a:r>
+          </a:p>
+        </p:txBody>
+      </p:sp>
+      <p:sp>
+        <p:nvSpPr>
+          <p:cNvPr id="65" name="frescura_celda_gestiones_3"/>
+          <p:cNvSpPr txBox="1"/>
+          <p:nvPr/>
+        </p:nvSpPr>
+        <p:spPr>
+          <a:xfrm>
+            <a:off x="7459789" y="5413248"/>
+            <a:ext cx="1091153" cy="603504"/>
+          </a:xfrm>
+          <a:prstGeom prst="rect">
+            <a:avLst/>
+          </a:prstGeom>
+          <a:noFill/>
+        </p:spPr>
+        <p:txBody>
+          <a:bodyPr wrap="square" anchor="ctr" lIns="73152" rIns="73152" tIns="18288" bIns="18288">
+            <a:spAutoFit/>
+          </a:bodyPr>
+          <a:lstStyle/>
+          <a:p>
+            <a:pPr algn="r"/>
+            <a:r>
+              <a:rPr sz="1200" b="0">
+                <a:solidFill>
+                  <a:srgbClr val="EAF1FB"/>
+                </a:solidFill>
+                <a:latin typeface="Segoe UI"/>
+              </a:rPr>
+              <a:t>7.259</a:t>
+            </a:r>
+          </a:p>
+        </p:txBody>
+      </p:sp>
+      <p:sp>
+        <p:nvSpPr>
+          <p:cNvPr id="66" name="frescura_celda_gestiones_4"/>
+          <p:cNvSpPr txBox="1"/>
+          <p:nvPr/>
+        </p:nvSpPr>
+        <p:spPr>
+          <a:xfrm>
+            <a:off x="8550942" y="5413248"/>
+            <a:ext cx="1745845" cy="603504"/>
+          </a:xfrm>
+          <a:prstGeom prst="rect">
+            <a:avLst/>
+          </a:prstGeom>
+          <a:noFill/>
+        </p:spPr>
+        <p:txBody>
+          <a:bodyPr wrap="square" anchor="ctr" lIns="73152" rIns="73152" tIns="18288" bIns="18288">
+            <a:spAutoFit/>
+          </a:bodyPr>
+          <a:lstStyle/>
+          <a:p>
+            <a:pPr algn="l"/>
+            <a:r>
+              <a:rPr sz="1100" b="0">
+                <a:solidFill>
+                  <a:srgbClr val="B9C8DC"/>
+                </a:solidFill>
+                <a:latin typeface="Segoe UI"/>
+              </a:rPr>
+              <a:t>Todos los días</a:t>
+            </a:r>
+          </a:p>
+        </p:txBody>
+      </p:sp>
+      <p:sp>
+        <p:nvSpPr>
+          <p:cNvPr id="67" name="frescura_chip_gestiones"/>
+          <p:cNvSpPr/>
+          <p:nvPr/>
+        </p:nvSpPr>
+        <p:spPr>
+          <a:xfrm>
+            <a:off x="10388228" y="5541264"/>
+            <a:ext cx="1071946" cy="347472"/>
+          </a:xfrm>
+          <a:prstGeom prst="roundRect">
+            <a:avLst>
+              <a:gd name="adj" fmla="val 18000"/>
+            </a:avLst>
+          </a:prstGeom>
+          <a:solidFill>
+            <a:srgbClr val="00C896"/>
+          </a:solidFill>
+          <a:ln>
+            <a:noFill/>
+          </a:ln>
+          <a:effectLst/>
+        </p:spPr>
+        <p:style>
+          <a:lnRef idx="1">
+            <a:schemeClr val="accent1"/>
+          </a:lnRef>
+          <a:fillRef idx="3">
+            <a:schemeClr val="accent1"/>
+          </a:fillRef>
+          <a:effectRef idx="2">
+            <a:schemeClr val="accent1"/>
+          </a:effectRef>
+          <a:fontRef idx="minor">
+            <a:schemeClr val="lt1"/>
+          </a:fontRef>
+        </p:style>
+        <p:txBody>
+          <a:bodyPr rtlCol="0" anchor="ctr" lIns="36576" rIns="36576"/>
+          <a:lstStyle/>
+          <a:p>
+            <a:pPr algn="ctr"/>
+            <a:r>
+              <a:rPr sz="1100" b="1">
+                <a:solidFill>
+                  <a:srgbClr val="081527"/>
+                </a:solidFill>
+                <a:latin typeface="Segoe UI"/>
+              </a:rPr>
+              <a:t>Al día</a:t>
+            </a:r>
+          </a:p>
+        </p:txBody>
+      </p:sp>
+      <p:sp>
+        <p:nvSpPr>
+          <p:cNvPr id="68" name="frescura_leyenda_al_dia"/>
+          <p:cNvSpPr/>
+          <p:nvPr/>
+        </p:nvSpPr>
+        <p:spPr>
+          <a:xfrm>
+            <a:off x="640080" y="6291072"/>
+            <a:ext cx="164592" cy="164592"/>
+          </a:xfrm>
+          <a:prstGeom prst="ellipse">
+            <a:avLst/>
+          </a:prstGeom>
+          <a:solidFill>
+            <a:srgbClr val="00C896"/>
+          </a:solidFill>
+          <a:ln>
+            <a:noFill/>
+          </a:ln>
+          <a:effectLst/>
+        </p:spPr>
+        <p:style>
+          <a:lnRef idx="1">
+            <a:schemeClr val="accent1"/>
+          </a:lnRef>
+          <a:fillRef idx="3">
+            <a:schemeClr val="accent1"/>
+          </a:fillRef>
+          <a:effectRef idx="2">
+            <a:schemeClr val="accent1"/>
+          </a:effectRef>
+          <a:fontRef idx="minor">
+            <a:schemeClr val="lt1"/>
+          </a:fontRef>
+        </p:style>
+        <p:txBody>
+          <a:bodyPr rtlCol="0" anchor="ctr"/>
+          <a:lstStyle/>
+          <a:p>
+            <a:pPr algn="ctr"/>
+          </a:p>
+        </p:txBody>
+      </p:sp>
+      <p:sp>
+        <p:nvSpPr>
+          <p:cNvPr id="69" name="TextBox 68"/>
+          <p:cNvSpPr txBox="1"/>
+          <p:nvPr/>
+        </p:nvSpPr>
+        <p:spPr>
+          <a:xfrm>
+            <a:off x="822959" y="6144768"/>
+            <a:ext cx="1234440" cy="457200"/>
+          </a:xfrm>
+          <a:prstGeom prst="rect">
+            <a:avLst/>
+          </a:prstGeom>
+          <a:noFill/>
+        </p:spPr>
+        <p:txBody>
+          <a:bodyPr wrap="square" anchor="ctr" lIns="73152" rIns="73152" tIns="18288" bIns="18288">
+            <a:spAutoFit/>
+          </a:bodyPr>
+          <a:lstStyle/>
+          <a:p>
+            <a:pPr algn="l"/>
+            <a:r>
+              <a:rPr sz="1100" b="1">
+                <a:solidFill>
+                  <a:srgbClr val="B9C8DC"/>
+                </a:solidFill>
+                <a:latin typeface="Segoe UI"/>
+              </a:rPr>
+              <a:t>Al día</a:t>
+            </a:r>
+          </a:p>
+        </p:txBody>
+      </p:sp>
+      <p:sp>
+        <p:nvSpPr>
+          <p:cNvPr id="70" name="frescura_leyenda_atrasada"/>
+          <p:cNvSpPr/>
+          <p:nvPr/>
+        </p:nvSpPr>
+        <p:spPr>
+          <a:xfrm>
+            <a:off x="2103120" y="6291072"/>
+            <a:ext cx="164592" cy="164592"/>
+          </a:xfrm>
+          <a:prstGeom prst="ellipse">
+            <a:avLst/>
+          </a:prstGeom>
+          <a:solidFill>
+            <a:srgbClr val="F2B441"/>
+          </a:solidFill>
+          <a:ln>
+            <a:noFill/>
+          </a:ln>
+          <a:effectLst/>
+        </p:spPr>
+        <p:style>
+          <a:lnRef idx="1">
+            <a:schemeClr val="accent1"/>
+          </a:lnRef>
+          <a:fillRef idx="3">
+            <a:schemeClr val="accent1"/>
+          </a:fillRef>
+          <a:effectRef idx="2">
+            <a:schemeClr val="accent1"/>
+          </a:effectRef>
+          <a:fontRef idx="minor">
+            <a:schemeClr val="lt1"/>
+          </a:fontRef>
+        </p:style>
+        <p:txBody>
+          <a:bodyPr rtlCol="0" anchor="ctr"/>
+          <a:lstStyle/>
+          <a:p>
+            <a:pPr algn="ctr"/>
+          </a:p>
+        </p:txBody>
+      </p:sp>
+      <p:sp>
+        <p:nvSpPr>
+          <p:cNvPr id="71" name="TextBox 70"/>
+          <p:cNvSpPr txBox="1"/>
+          <p:nvPr/>
+        </p:nvSpPr>
+        <p:spPr>
+          <a:xfrm>
+            <a:off x="2286000" y="6144768"/>
+            <a:ext cx="1234440" cy="457200"/>
+          </a:xfrm>
+          <a:prstGeom prst="rect">
+            <a:avLst/>
+          </a:prstGeom>
+          <a:noFill/>
+        </p:spPr>
+        <p:txBody>
+          <a:bodyPr wrap="square" anchor="ctr" lIns="73152" rIns="73152" tIns="18288" bIns="18288">
+            <a:spAutoFit/>
+          </a:bodyPr>
+          <a:lstStyle/>
+          <a:p>
+            <a:pPr algn="l"/>
+            <a:r>
+              <a:rPr sz="1100" b="1">
+                <a:solidFill>
+                  <a:srgbClr val="B9C8DC"/>
+                </a:solidFill>
+                <a:latin typeface="Segoe UI"/>
+              </a:rPr>
+              <a:t>Atrasada</a:t>
+            </a:r>
+          </a:p>
+        </p:txBody>
+      </p:sp>
+      <p:sp>
+        <p:nvSpPr>
+          <p:cNvPr id="72" name="frescura_leyenda_sin_datos"/>
+          <p:cNvSpPr/>
+          <p:nvPr/>
+        </p:nvSpPr>
+        <p:spPr>
+          <a:xfrm>
+            <a:off x="3566160" y="6291072"/>
+            <a:ext cx="164592" cy="164592"/>
+          </a:xfrm>
+          <a:prstGeom prst="ellipse">
+            <a:avLst/>
+          </a:prstGeom>
+          <a:solidFill>
+            <a:srgbClr val="FF7675"/>
+          </a:solidFill>
+          <a:ln>
+            <a:noFill/>
+          </a:ln>
+          <a:effectLst/>
+        </p:spPr>
+        <p:style>
+          <a:lnRef idx="1">
+            <a:schemeClr val="accent1"/>
+          </a:lnRef>
+          <a:fillRef idx="3">
+            <a:schemeClr val="accent1"/>
+          </a:fillRef>
+          <a:effectRef idx="2">
+            <a:schemeClr val="accent1"/>
+          </a:effectRef>
+          <a:fontRef idx="minor">
+            <a:schemeClr val="lt1"/>
+          </a:fontRef>
+        </p:style>
+        <p:txBody>
+          <a:bodyPr rtlCol="0" anchor="ctr"/>
+          <a:lstStyle/>
+          <a:p>
+            <a:pPr algn="ctr"/>
+          </a:p>
+        </p:txBody>
+      </p:sp>
+      <p:sp>
+        <p:nvSpPr>
+          <p:cNvPr id="73" name="TextBox 72"/>
+          <p:cNvSpPr txBox="1"/>
+          <p:nvPr/>
+        </p:nvSpPr>
+        <p:spPr>
+          <a:xfrm>
+            <a:off x="3749039" y="6144768"/>
+            <a:ext cx="1234440" cy="457200"/>
+          </a:xfrm>
+          <a:prstGeom prst="rect">
+            <a:avLst/>
+          </a:prstGeom>
+          <a:noFill/>
+        </p:spPr>
+        <p:txBody>
+          <a:bodyPr wrap="square" anchor="ctr" lIns="73152" rIns="73152" tIns="18288" bIns="18288">
+            <a:spAutoFit/>
+          </a:bodyPr>
+          <a:lstStyle/>
+          <a:p>
+            <a:pPr algn="l"/>
+            <a:r>
+              <a:rPr sz="1100" b="1">
+                <a:solidFill>
+                  <a:srgbClr val="B9C8DC"/>
+                </a:solidFill>
+                <a:latin typeface="Segoe UI"/>
+              </a:rPr>
+              <a:t>Sin cargar</a:t>
+            </a:r>
+          </a:p>
+        </p:txBody>
+      </p:sp>
+      <p:sp>
+        <p:nvSpPr>
+          <p:cNvPr id="74" name="TextBox 73"/>
+          <p:cNvSpPr txBox="1"/>
+          <p:nvPr/>
+        </p:nvSpPr>
+        <p:spPr>
+          <a:xfrm>
+            <a:off x="5029200" y="6144768"/>
+            <a:ext cx="6522414" cy="457200"/>
+          </a:xfrm>
+          <a:prstGeom prst="rect">
+            <a:avLst/>
+          </a:prstGeom>
+          <a:noFill/>
+        </p:spPr>
+        <p:txBody>
+          <a:bodyPr wrap="square" anchor="ctr" lIns="73152" rIns="73152" tIns="18288" bIns="18288">
+            <a:spAutoFit/>
+          </a:bodyPr>
+          <a:lstStyle/>
+          <a:p>
+            <a:pPr algn="l"/>
+            <a:r>
+              <a:rPr sz="1000" b="0">
+                <a:solidFill>
+                  <a:srgbClr val="9DB0C8"/>
+                </a:solidFill>
+                <a:latin typeface="Segoe UI"/>
+              </a:rPr>
+              <a:t>Umbral de atraso (período esperado × 1,5):  diaria &gt; 36 horas  ·  semanal &gt; 10 días  ·  mensual &gt; 45 días  ·  manual: no vence</a:t>
+            </a:r>
+          </a:p>
+        </p:txBody>
+      </p:sp>
     </p:spTree>
   </p:cSld>
   <p:clrMapOvr>
@@ -8291,7 +11332,7 @@
                 </a:solidFill>
                 <a:latin typeface="Segoe UI"/>
               </a:rPr>
-              <a:t>Agente IA Negociador</a:t>
+              <a:t>Dashboard · Visión general</a:t>
             </a:r>
           </a:p>
         </p:txBody>
@@ -8326,7 +11367,7 @@
                 </a:solidFill>
                 <a:latin typeface="Segoe UI"/>
               </a:rPr>
-              <a:t>Estrategias recomendadas y simulador de negociación con guion por deudor.</a:t>
+              <a:t>KPIs en vivo, filtros dinámicos y gráficos de cartera vs. recupero.</a:t>
             </a:r>
           </a:p>
         </p:txBody>
@@ -8348,7 +11389,7 @@
           <a:noFill/>
           <a:ln w="12700">
             <a:solidFill>
-              <a:srgbClr val="2F74C0"/>
+              <a:srgbClr val="215EA3"/>
             </a:solidFill>
           </a:ln>
           <a:effectLst/>
@@ -8377,7 +11418,7 @@
       </p:sp>
       <p:pic>
         <p:nvPicPr>
-          <p:cNvPr id="5" name="Picture 4" descr="dashboard_negociador.png"/>
+          <p:cNvPr id="5" name="Picture 4" descr="dashboard_overview.png"/>
           <p:cNvPicPr>
             <a:picLocks noChangeAspect="1"/>
           </p:cNvPicPr>
@@ -8455,7 +11496,7 @@
                 </a:solidFill>
                 <a:latin typeface="Segoe UI"/>
               </a:rPr>
-              <a:t>Cartera priorizada + Export</a:t>
+              <a:t>Agente IA Negociador</a:t>
             </a:r>
           </a:p>
         </p:txBody>
@@ -8490,7 +11531,7 @@
                 </a:solidFill>
                 <a:latin typeface="Segoe UI"/>
               </a:rPr>
-              <a:t>Ranking por valor esperado y exportación a Excel/CSV para reporting.</a:t>
+              <a:t>Estrategias recomendadas y simulador de negociación con guion por deudor.</a:t>
             </a:r>
           </a:p>
         </p:txBody>
@@ -8512,7 +11553,7 @@
           <a:noFill/>
           <a:ln w="12700">
             <a:solidFill>
-              <a:srgbClr val="2F74C0"/>
+              <a:srgbClr val="215EA3"/>
             </a:solidFill>
           </a:ln>
           <a:effectLst/>
@@ -8541,7 +11582,7 @@
       </p:sp>
       <p:pic>
         <p:nvPicPr>
-          <p:cNvPr id="5" name="Picture 4" descr="dashboard_cartera.png"/>
+          <p:cNvPr id="5" name="Picture 4" descr="dashboard_negociador.png"/>
           <p:cNvPicPr>
             <a:picLocks noChangeAspect="1"/>
           </p:cNvPicPr>
@@ -8619,7 +11660,7 @@
                 </a:solidFill>
                 <a:latin typeface="Segoe UI"/>
               </a:rPr>
-              <a:t>Copiloto de Negociación en Vivo</a:t>
+              <a:t>Cartera priorizada + Export</a:t>
             </a:r>
           </a:p>
         </p:txBody>
@@ -8654,7 +11695,7 @@
                 </a:solidFill>
                 <a:latin typeface="Segoe UI"/>
               </a:rPr>
-              <a:t>Sentimiento del cliente turno a turno, técnicas del gestor y la próxima jugada sugerida.</a:t>
+              <a:t>Ranking por valor esperado y exportación a Excel/CSV para reporting.</a:t>
             </a:r>
           </a:p>
         </p:txBody>
@@ -8676,7 +11717,7 @@
           <a:noFill/>
           <a:ln w="12700">
             <a:solidFill>
-              <a:srgbClr val="2F74C0"/>
+              <a:srgbClr val="215EA3"/>
             </a:solidFill>
           </a:ln>
           <a:effectLst/>
@@ -8705,7 +11746,7 @@
       </p:sp>
       <p:pic>
         <p:nvPicPr>
-          <p:cNvPr id="5" name="Picture 4" descr="dashboard_copiloto_detalle.png"/>
+          <p:cNvPr id="5" name="Picture 4" descr="dashboard_cartera.png"/>
           <p:cNvPicPr>
             <a:picLocks noChangeAspect="1"/>
           </p:cNvPicPr>
@@ -8720,7 +11761,7 @@
         <p:spPr>
           <a:xfrm>
             <a:off x="640080" y="1554480"/>
-            <a:ext cx="10927080" cy="6829425"/>
+            <a:ext cx="10927080" cy="7512367"/>
           </a:xfrm>
           <a:prstGeom prst="rect">
             <a:avLst/>
